--- a/ppt/CareCompanion-IE1.pptx
+++ b/ppt/CareCompanion-IE1.pptx
@@ -38480,270 +38480,733 @@
       </p:sp>
       <p:sp>
         <p:nvSpPr>
-          <p:cNvPr id="499" name="Google Shape;499;p48"/>
-          <p:cNvSpPr txBox="1"/>
+          <p:cNvPr id="499" name="Rounded Rectangle 498"/>
+          <p:cNvSpPr/>
           <p:nvPr/>
         </p:nvSpPr>
         <p:spPr>
           <a:xfrm>
-            <a:off x="480073" y="891540"/>
-            <a:ext cx="8229819" cy="3771900"/>
-          </a:xfrm>
-          <a:prstGeom prst="rect">
-            <a:avLst/>
-          </a:prstGeom>
-          <a:noFill/>
+            <a:off x="484632" y="960120"/>
+            <a:ext cx="3840480" cy="1024128"/>
+          </a:xfrm>
+          <a:prstGeom prst="roundRect">
+            <a:avLst/>
+          </a:prstGeom>
+          <a:solidFill>
+            <a:srgbClr val="FFFFFF"/>
+          </a:solidFill>
           <a:ln>
             <a:noFill/>
           </a:ln>
-        </p:spPr>
-        <p:txBody>
-          <a:bodyPr anchorCtr="0" anchor="t" bIns="34275" lIns="68575" spcFirstLastPara="1" rIns="68575" wrap="square" tIns="34275">
-            <a:spAutoFit/>
-          </a:bodyPr>
+          <a:effectLst/>
+        </p:spPr>
+        <p:style>
+          <a:lnRef idx="1">
+            <a:schemeClr val="accent1"/>
+          </a:lnRef>
+          <a:fillRef idx="3">
+            <a:schemeClr val="accent1"/>
+          </a:fillRef>
+          <a:effectRef idx="2">
+            <a:schemeClr val="accent1"/>
+          </a:effectRef>
+          <a:fontRef idx="minor">
+            <a:schemeClr val="lt1"/>
+          </a:fontRef>
+        </p:style>
+        <p:txBody>
+          <a:bodyPr rtlCol="0" anchor="ctr" wrap="square"/>
           <a:lstStyle/>
           <a:p>
-            <a:pPr indent="0" lvl="0" marL="0" marR="0" rtl="0" algn="l">
-              <a:lnSpc>
-                <a:spcPct val="150000"/>
-              </a:lnSpc>
-              <a:spcBef>
-                <a:spcPts val="0"/>
-              </a:spcBef>
-              <a:spcAft>
-                <a:spcPts val="0"/>
-              </a:spcAft>
-              <a:buNone/>
-            </a:pPr>
-            <a:r>
-              <a:rPr b="0" i="0" lang="en" sz="1200" u="none" cap="none" strike="noStrike">
+            <a:pPr algn="ctr"/>
+            <a:r>
+              <a:rPr sz="1250" b="1">
+                <a:solidFill>
+                  <a:srgbClr val="9B1C2E"/>
+                </a:solidFill>
+                <a:latin typeface="Georgia"/>
+              </a:rPr>
+              <a:t>Language &amp; UI</a:t>
+            </a:r>
+          </a:p>
+          <a:p>
+            <a:pPr algn="ctr"/>
+            <a:r>
+              <a:rPr sz="1100" b="0">
                 <a:solidFill>
                   <a:srgbClr val="101010"/>
                 </a:solidFill>
                 <a:latin typeface="Calibri"/>
-                <a:ea typeface="Calibri"/>
-                <a:cs typeface="Calibri"/>
-                <a:sym typeface="Calibri"/>
-              </a:rPr>
-              <a:t>• Language &amp; UI: Kotlin, Jetpack Compose, Material 3</a:t>
-            </a:r>
-            <a:endParaRPr sz="1100"/>
-          </a:p>
-          <a:p>
-            <a:pPr indent="0" lvl="0" marL="0" marR="0" rtl="0" algn="l">
-              <a:lnSpc>
-                <a:spcPct val="150000"/>
-              </a:lnSpc>
-              <a:spcBef>
-                <a:spcPts val="0"/>
-              </a:spcBef>
-              <a:spcAft>
-                <a:spcPts val="0"/>
-              </a:spcAft>
-              <a:buNone/>
-            </a:pPr>
-            <a:r>
-              <a:rPr b="0" i="0" lang="en" sz="1200" u="none" cap="none" strike="noStrike">
+              </a:rPr>
+              <a:t>Kotlin · Jetpack Compose · Material 3</a:t>
+            </a:r>
+          </a:p>
+        </p:txBody>
+      </p:sp>
+      <p:sp>
+        <p:nvSpPr>
+          <p:cNvPr id="500" name="Oval 499"/>
+          <p:cNvSpPr/>
+          <p:nvPr/>
+        </p:nvSpPr>
+        <p:spPr>
+          <a:xfrm>
+            <a:off x="2267712" y="786384"/>
+            <a:ext cx="347472" cy="347472"/>
+          </a:xfrm>
+          <a:prstGeom prst="ellipse">
+            <a:avLst/>
+          </a:prstGeom>
+          <a:solidFill>
+            <a:srgbClr val="101010"/>
+          </a:solidFill>
+          <a:ln>
+            <a:noFill/>
+          </a:ln>
+          <a:effectLst/>
+        </p:spPr>
+        <p:style>
+          <a:lnRef idx="1">
+            <a:schemeClr val="accent1"/>
+          </a:lnRef>
+          <a:fillRef idx="3">
+            <a:schemeClr val="accent1"/>
+          </a:fillRef>
+          <a:effectRef idx="2">
+            <a:schemeClr val="accent1"/>
+          </a:effectRef>
+          <a:fontRef idx="minor">
+            <a:schemeClr val="lt1"/>
+          </a:fontRef>
+        </p:style>
+        <p:txBody>
+          <a:bodyPr rtlCol="0" anchor="ctr" wrap="square" lIns="73152" rIns="73152" tIns="36576" bIns="36576"/>
+          <a:lstStyle/>
+          <a:p>
+            <a:pPr algn="ctr">
+              <a:spcAft>
+                <a:spcPts val="0"/>
+              </a:spcAft>
+            </a:pPr>
+            <a:r>
+              <a:rPr sz="1200" b="1">
+                <a:solidFill>
+                  <a:srgbClr val="FFFFFF"/>
+                </a:solidFill>
+                <a:latin typeface="Georgia"/>
+              </a:rPr>
+              <a:t>1</a:t>
+            </a:r>
+          </a:p>
+        </p:txBody>
+      </p:sp>
+      <p:sp>
+        <p:nvSpPr>
+          <p:cNvPr id="501" name="Rounded Rectangle 500"/>
+          <p:cNvSpPr/>
+          <p:nvPr/>
+        </p:nvSpPr>
+        <p:spPr>
+          <a:xfrm>
+            <a:off x="4800600" y="960120"/>
+            <a:ext cx="3840480" cy="1024128"/>
+          </a:xfrm>
+          <a:prstGeom prst="roundRect">
+            <a:avLst/>
+          </a:prstGeom>
+          <a:solidFill>
+            <a:srgbClr val="FFFFFF"/>
+          </a:solidFill>
+          <a:ln>
+            <a:noFill/>
+          </a:ln>
+          <a:effectLst/>
+        </p:spPr>
+        <p:style>
+          <a:lnRef idx="1">
+            <a:schemeClr val="accent1"/>
+          </a:lnRef>
+          <a:fillRef idx="3">
+            <a:schemeClr val="accent1"/>
+          </a:fillRef>
+          <a:effectRef idx="2">
+            <a:schemeClr val="accent1"/>
+          </a:effectRef>
+          <a:fontRef idx="minor">
+            <a:schemeClr val="lt1"/>
+          </a:fontRef>
+        </p:style>
+        <p:txBody>
+          <a:bodyPr rtlCol="0" anchor="ctr" wrap="square"/>
+          <a:lstStyle/>
+          <a:p>
+            <a:pPr algn="ctr"/>
+            <a:r>
+              <a:rPr sz="1250" b="1">
+                <a:solidFill>
+                  <a:srgbClr val="9B1C2E"/>
+                </a:solidFill>
+                <a:latin typeface="Georgia"/>
+              </a:rPr>
+              <a:t>Architecture</a:t>
+            </a:r>
+          </a:p>
+          <a:p>
+            <a:pPr algn="ctr"/>
+            <a:r>
+              <a:rPr sz="1100" b="0">
                 <a:solidFill>
                   <a:srgbClr val="101010"/>
                 </a:solidFill>
                 <a:latin typeface="Calibri"/>
-                <a:ea typeface="Calibri"/>
-                <a:cs typeface="Calibri"/>
-                <a:sym typeface="Calibri"/>
-              </a:rPr>
-              <a:t>• Architecture: MVVM, Hilt dependency injection, Navigation Compose</a:t>
-            </a:r>
-            <a:endParaRPr sz="1100"/>
-          </a:p>
-          <a:p>
-            <a:pPr indent="0" lvl="0" marL="0" marR="0" rtl="0" algn="l">
-              <a:lnSpc>
-                <a:spcPct val="150000"/>
-              </a:lnSpc>
-              <a:spcBef>
-                <a:spcPts val="0"/>
-              </a:spcBef>
-              <a:spcAft>
-                <a:spcPts val="0"/>
-              </a:spcAft>
-              <a:buNone/>
-            </a:pPr>
-            <a:r>
-              <a:rPr b="0" i="0" lang="en" sz="1200" u="none" cap="none" strike="noStrike">
+              </a:rPr>
+              <a:t>MVVM · Hilt · Navigation Compose</a:t>
+            </a:r>
+          </a:p>
+        </p:txBody>
+      </p:sp>
+      <p:sp>
+        <p:nvSpPr>
+          <p:cNvPr id="502" name="Oval 501"/>
+          <p:cNvSpPr/>
+          <p:nvPr/>
+        </p:nvSpPr>
+        <p:spPr>
+          <a:xfrm>
+            <a:off x="6583680" y="786384"/>
+            <a:ext cx="347472" cy="347472"/>
+          </a:xfrm>
+          <a:prstGeom prst="ellipse">
+            <a:avLst/>
+          </a:prstGeom>
+          <a:solidFill>
+            <a:srgbClr val="101010"/>
+          </a:solidFill>
+          <a:ln>
+            <a:noFill/>
+          </a:ln>
+          <a:effectLst/>
+        </p:spPr>
+        <p:style>
+          <a:lnRef idx="1">
+            <a:schemeClr val="accent1"/>
+          </a:lnRef>
+          <a:fillRef idx="3">
+            <a:schemeClr val="accent1"/>
+          </a:fillRef>
+          <a:effectRef idx="2">
+            <a:schemeClr val="accent1"/>
+          </a:effectRef>
+          <a:fontRef idx="minor">
+            <a:schemeClr val="lt1"/>
+          </a:fontRef>
+        </p:style>
+        <p:txBody>
+          <a:bodyPr rtlCol="0" anchor="ctr" wrap="square" lIns="73152" rIns="73152" tIns="36576" bIns="36576"/>
+          <a:lstStyle/>
+          <a:p>
+            <a:pPr algn="ctr">
+              <a:spcAft>
+                <a:spcPts val="0"/>
+              </a:spcAft>
+            </a:pPr>
+            <a:r>
+              <a:rPr sz="1200" b="1">
+                <a:solidFill>
+                  <a:srgbClr val="FFFFFF"/>
+                </a:solidFill>
+                <a:latin typeface="Georgia"/>
+              </a:rPr>
+              <a:t>2</a:t>
+            </a:r>
+          </a:p>
+        </p:txBody>
+      </p:sp>
+      <p:sp>
+        <p:nvSpPr>
+          <p:cNvPr id="503" name="Rounded Rectangle 502"/>
+          <p:cNvSpPr/>
+          <p:nvPr/>
+        </p:nvSpPr>
+        <p:spPr>
+          <a:xfrm>
+            <a:off x="484632" y="2194560"/>
+            <a:ext cx="3840480" cy="1024128"/>
+          </a:xfrm>
+          <a:prstGeom prst="roundRect">
+            <a:avLst/>
+          </a:prstGeom>
+          <a:solidFill>
+            <a:srgbClr val="FFFFFF"/>
+          </a:solidFill>
+          <a:ln>
+            <a:noFill/>
+          </a:ln>
+          <a:effectLst/>
+        </p:spPr>
+        <p:style>
+          <a:lnRef idx="1">
+            <a:schemeClr val="accent1"/>
+          </a:lnRef>
+          <a:fillRef idx="3">
+            <a:schemeClr val="accent1"/>
+          </a:fillRef>
+          <a:effectRef idx="2">
+            <a:schemeClr val="accent1"/>
+          </a:effectRef>
+          <a:fontRef idx="minor">
+            <a:schemeClr val="lt1"/>
+          </a:fontRef>
+        </p:style>
+        <p:txBody>
+          <a:bodyPr rtlCol="0" anchor="ctr" wrap="square"/>
+          <a:lstStyle/>
+          <a:p>
+            <a:pPr algn="ctr"/>
+            <a:r>
+              <a:rPr sz="1250" b="1">
+                <a:solidFill>
+                  <a:srgbClr val="9B1C2E"/>
+                </a:solidFill>
+                <a:latin typeface="Georgia"/>
+              </a:rPr>
+              <a:t>Backend</a:t>
+            </a:r>
+          </a:p>
+          <a:p>
+            <a:pPr algn="ctr"/>
+            <a:r>
+              <a:rPr sz="1100" b="0">
                 <a:solidFill>
                   <a:srgbClr val="101010"/>
                 </a:solidFill>
                 <a:latin typeface="Calibri"/>
-                <a:ea typeface="Calibri"/>
-                <a:cs typeface="Calibri"/>
-                <a:sym typeface="Calibri"/>
-              </a:rPr>
-              <a:t>• Backend: Supabase (PostgreSQL) with row-level security — 17 tables, 33 policies</a:t>
-            </a:r>
-            <a:endParaRPr sz="1100"/>
-          </a:p>
-          <a:p>
-            <a:pPr indent="0" lvl="0" marL="0" marR="0" rtl="0" algn="l">
-              <a:lnSpc>
-                <a:spcPct val="150000"/>
-              </a:lnSpc>
-              <a:spcBef>
-                <a:spcPts val="0"/>
-              </a:spcBef>
-              <a:spcAft>
-                <a:spcPts val="0"/>
-              </a:spcAft>
-              <a:buNone/>
-            </a:pPr>
-            <a:r>
-              <a:rPr b="0" i="0" lang="en" sz="1200" u="none" cap="none" strike="noStrike">
+              </a:rPr>
+              <a:t>Supabase (PostgreSQL) · Row-level security</a:t>
+            </a:r>
+          </a:p>
+        </p:txBody>
+      </p:sp>
+      <p:sp>
+        <p:nvSpPr>
+          <p:cNvPr id="504" name="Oval 503"/>
+          <p:cNvSpPr/>
+          <p:nvPr/>
+        </p:nvSpPr>
+        <p:spPr>
+          <a:xfrm>
+            <a:off x="2267712" y="2020824"/>
+            <a:ext cx="347472" cy="347472"/>
+          </a:xfrm>
+          <a:prstGeom prst="ellipse">
+            <a:avLst/>
+          </a:prstGeom>
+          <a:solidFill>
+            <a:srgbClr val="101010"/>
+          </a:solidFill>
+          <a:ln>
+            <a:noFill/>
+          </a:ln>
+          <a:effectLst/>
+        </p:spPr>
+        <p:style>
+          <a:lnRef idx="1">
+            <a:schemeClr val="accent1"/>
+          </a:lnRef>
+          <a:fillRef idx="3">
+            <a:schemeClr val="accent1"/>
+          </a:fillRef>
+          <a:effectRef idx="2">
+            <a:schemeClr val="accent1"/>
+          </a:effectRef>
+          <a:fontRef idx="minor">
+            <a:schemeClr val="lt1"/>
+          </a:fontRef>
+        </p:style>
+        <p:txBody>
+          <a:bodyPr rtlCol="0" anchor="ctr" wrap="square" lIns="73152" rIns="73152" tIns="36576" bIns="36576"/>
+          <a:lstStyle/>
+          <a:p>
+            <a:pPr algn="ctr">
+              <a:spcAft>
+                <a:spcPts val="0"/>
+              </a:spcAft>
+            </a:pPr>
+            <a:r>
+              <a:rPr sz="1200" b="1">
+                <a:solidFill>
+                  <a:srgbClr val="FFFFFF"/>
+                </a:solidFill>
+                <a:latin typeface="Georgia"/>
+              </a:rPr>
+              <a:t>3</a:t>
+            </a:r>
+          </a:p>
+        </p:txBody>
+      </p:sp>
+      <p:sp>
+        <p:nvSpPr>
+          <p:cNvPr id="505" name="Rounded Rectangle 504"/>
+          <p:cNvSpPr/>
+          <p:nvPr/>
+        </p:nvSpPr>
+        <p:spPr>
+          <a:xfrm>
+            <a:off x="4800600" y="2194560"/>
+            <a:ext cx="3840480" cy="1024128"/>
+          </a:xfrm>
+          <a:prstGeom prst="roundRect">
+            <a:avLst/>
+          </a:prstGeom>
+          <a:solidFill>
+            <a:srgbClr val="FFFFFF"/>
+          </a:solidFill>
+          <a:ln>
+            <a:noFill/>
+          </a:ln>
+          <a:effectLst/>
+        </p:spPr>
+        <p:style>
+          <a:lnRef idx="1">
+            <a:schemeClr val="accent1"/>
+          </a:lnRef>
+          <a:fillRef idx="3">
+            <a:schemeClr val="accent1"/>
+          </a:fillRef>
+          <a:effectRef idx="2">
+            <a:schemeClr val="accent1"/>
+          </a:effectRef>
+          <a:fontRef idx="minor">
+            <a:schemeClr val="lt1"/>
+          </a:fontRef>
+        </p:style>
+        <p:txBody>
+          <a:bodyPr rtlCol="0" anchor="ctr" wrap="square"/>
+          <a:lstStyle/>
+          <a:p>
+            <a:pPr algn="ctr"/>
+            <a:r>
+              <a:rPr sz="1250" b="1">
+                <a:solidFill>
+                  <a:srgbClr val="9B1C2E"/>
+                </a:solidFill>
+                <a:latin typeface="Georgia"/>
+              </a:rPr>
+              <a:t>Authentication &amp; Push</a:t>
+            </a:r>
+          </a:p>
+          <a:p>
+            <a:pPr algn="ctr"/>
+            <a:r>
+              <a:rPr sz="1100" b="0">
                 <a:solidFill>
                   <a:srgbClr val="101010"/>
                 </a:solidFill>
                 <a:latin typeface="Calibri"/>
-                <a:ea typeface="Calibri"/>
-                <a:cs typeface="Calibri"/>
-                <a:sym typeface="Calibri"/>
-              </a:rPr>
-              <a:t>• Authentication: Firebase Authentication, Google Sign-In via Credential Manager</a:t>
-            </a:r>
-            <a:endParaRPr sz="1100"/>
-          </a:p>
-          <a:p>
-            <a:pPr indent="0" lvl="0" marL="0" marR="0" rtl="0" algn="l">
-              <a:lnSpc>
-                <a:spcPct val="150000"/>
-              </a:lnSpc>
-              <a:spcBef>
-                <a:spcPts val="0"/>
-              </a:spcBef>
-              <a:spcAft>
-                <a:spcPts val="0"/>
-              </a:spcAft>
-              <a:buNone/>
-            </a:pPr>
-            <a:r>
-              <a:rPr b="0" i="0" lang="en" sz="1200" u="none" cap="none" strike="noStrike">
+              </a:rPr>
+              <a:t>Firebase Auth · Google Sign-In · Cloud Messaging</a:t>
+            </a:r>
+          </a:p>
+        </p:txBody>
+      </p:sp>
+      <p:sp>
+        <p:nvSpPr>
+          <p:cNvPr id="506" name="Oval 505"/>
+          <p:cNvSpPr/>
+          <p:nvPr/>
+        </p:nvSpPr>
+        <p:spPr>
+          <a:xfrm>
+            <a:off x="6583680" y="2020824"/>
+            <a:ext cx="347472" cy="347472"/>
+          </a:xfrm>
+          <a:prstGeom prst="ellipse">
+            <a:avLst/>
+          </a:prstGeom>
+          <a:solidFill>
+            <a:srgbClr val="101010"/>
+          </a:solidFill>
+          <a:ln>
+            <a:noFill/>
+          </a:ln>
+          <a:effectLst/>
+        </p:spPr>
+        <p:style>
+          <a:lnRef idx="1">
+            <a:schemeClr val="accent1"/>
+          </a:lnRef>
+          <a:fillRef idx="3">
+            <a:schemeClr val="accent1"/>
+          </a:fillRef>
+          <a:effectRef idx="2">
+            <a:schemeClr val="accent1"/>
+          </a:effectRef>
+          <a:fontRef idx="minor">
+            <a:schemeClr val="lt1"/>
+          </a:fontRef>
+        </p:style>
+        <p:txBody>
+          <a:bodyPr rtlCol="0" anchor="ctr" wrap="square" lIns="73152" rIns="73152" tIns="36576" bIns="36576"/>
+          <a:lstStyle/>
+          <a:p>
+            <a:pPr algn="ctr">
+              <a:spcAft>
+                <a:spcPts val="0"/>
+              </a:spcAft>
+            </a:pPr>
+            <a:r>
+              <a:rPr sz="1200" b="1">
+                <a:solidFill>
+                  <a:srgbClr val="FFFFFF"/>
+                </a:solidFill>
+                <a:latin typeface="Georgia"/>
+              </a:rPr>
+              <a:t>4</a:t>
+            </a:r>
+          </a:p>
+        </p:txBody>
+      </p:sp>
+      <p:sp>
+        <p:nvSpPr>
+          <p:cNvPr id="507" name="Rounded Rectangle 506"/>
+          <p:cNvSpPr/>
+          <p:nvPr/>
+        </p:nvSpPr>
+        <p:spPr>
+          <a:xfrm>
+            <a:off x="484632" y="3429000"/>
+            <a:ext cx="3840480" cy="1024128"/>
+          </a:xfrm>
+          <a:prstGeom prst="roundRect">
+            <a:avLst/>
+          </a:prstGeom>
+          <a:solidFill>
+            <a:srgbClr val="FFFFFF"/>
+          </a:solidFill>
+          <a:ln>
+            <a:noFill/>
+          </a:ln>
+          <a:effectLst/>
+        </p:spPr>
+        <p:style>
+          <a:lnRef idx="1">
+            <a:schemeClr val="accent1"/>
+          </a:lnRef>
+          <a:fillRef idx="3">
+            <a:schemeClr val="accent1"/>
+          </a:fillRef>
+          <a:effectRef idx="2">
+            <a:schemeClr val="accent1"/>
+          </a:effectRef>
+          <a:fontRef idx="minor">
+            <a:schemeClr val="lt1"/>
+          </a:fontRef>
+        </p:style>
+        <p:txBody>
+          <a:bodyPr rtlCol="0" anchor="ctr" wrap="square"/>
+          <a:lstStyle/>
+          <a:p>
+            <a:pPr algn="ctr"/>
+            <a:r>
+              <a:rPr sz="1250" b="1">
+                <a:solidFill>
+                  <a:srgbClr val="9B1C2E"/>
+                </a:solidFill>
+                <a:latin typeface="Georgia"/>
+              </a:rPr>
+              <a:t>Scheduling</a:t>
+            </a:r>
+          </a:p>
+          <a:p>
+            <a:pPr algn="ctr"/>
+            <a:r>
+              <a:rPr sz="1100" b="0">
                 <a:solidFill>
                   <a:srgbClr val="101010"/>
                 </a:solidFill>
                 <a:latin typeface="Calibri"/>
-                <a:ea typeface="Calibri"/>
-                <a:cs typeface="Calibri"/>
-                <a:sym typeface="Calibri"/>
-              </a:rPr>
-              <a:t>• Notifications: Firebase Cloud Messaging (data-only payloads)</a:t>
-            </a:r>
-            <a:endParaRPr sz="1100"/>
-          </a:p>
-          <a:p>
-            <a:pPr indent="0" lvl="0" marL="0" marR="0" rtl="0" algn="l">
-              <a:lnSpc>
-                <a:spcPct val="150000"/>
-              </a:lnSpc>
-              <a:spcBef>
-                <a:spcPts val="0"/>
-              </a:spcBef>
-              <a:spcAft>
-                <a:spcPts val="0"/>
-              </a:spcAft>
-              <a:buNone/>
-            </a:pPr>
-            <a:r>
-              <a:rPr b="0" i="0" lang="en" sz="1200" u="none" cap="none" strike="noStrike">
+              </a:rPr>
+              <a:t>AlarmManager · WorkManager · Boot receiver</a:t>
+            </a:r>
+          </a:p>
+        </p:txBody>
+      </p:sp>
+      <p:sp>
+        <p:nvSpPr>
+          <p:cNvPr id="508" name="Oval 507"/>
+          <p:cNvSpPr/>
+          <p:nvPr/>
+        </p:nvSpPr>
+        <p:spPr>
+          <a:xfrm>
+            <a:off x="2267712" y="3255264"/>
+            <a:ext cx="347472" cy="347472"/>
+          </a:xfrm>
+          <a:prstGeom prst="ellipse">
+            <a:avLst/>
+          </a:prstGeom>
+          <a:solidFill>
+            <a:srgbClr val="101010"/>
+          </a:solidFill>
+          <a:ln>
+            <a:noFill/>
+          </a:ln>
+          <a:effectLst/>
+        </p:spPr>
+        <p:style>
+          <a:lnRef idx="1">
+            <a:schemeClr val="accent1"/>
+          </a:lnRef>
+          <a:fillRef idx="3">
+            <a:schemeClr val="accent1"/>
+          </a:fillRef>
+          <a:effectRef idx="2">
+            <a:schemeClr val="accent1"/>
+          </a:effectRef>
+          <a:fontRef idx="minor">
+            <a:schemeClr val="lt1"/>
+          </a:fontRef>
+        </p:style>
+        <p:txBody>
+          <a:bodyPr rtlCol="0" anchor="ctr" wrap="square" lIns="73152" rIns="73152" tIns="36576" bIns="36576"/>
+          <a:lstStyle/>
+          <a:p>
+            <a:pPr algn="ctr">
+              <a:spcAft>
+                <a:spcPts val="0"/>
+              </a:spcAft>
+            </a:pPr>
+            <a:r>
+              <a:rPr sz="1200" b="1">
+                <a:solidFill>
+                  <a:srgbClr val="FFFFFF"/>
+                </a:solidFill>
+                <a:latin typeface="Georgia"/>
+              </a:rPr>
+              <a:t>5</a:t>
+            </a:r>
+          </a:p>
+        </p:txBody>
+      </p:sp>
+      <p:sp>
+        <p:nvSpPr>
+          <p:cNvPr id="509" name="Rounded Rectangle 508"/>
+          <p:cNvSpPr/>
+          <p:nvPr/>
+        </p:nvSpPr>
+        <p:spPr>
+          <a:xfrm>
+            <a:off x="4800600" y="3429000"/>
+            <a:ext cx="3840480" cy="1024128"/>
+          </a:xfrm>
+          <a:prstGeom prst="roundRect">
+            <a:avLst/>
+          </a:prstGeom>
+          <a:solidFill>
+            <a:srgbClr val="FFFFFF"/>
+          </a:solidFill>
+          <a:ln>
+            <a:noFill/>
+          </a:ln>
+          <a:effectLst/>
+        </p:spPr>
+        <p:style>
+          <a:lnRef idx="1">
+            <a:schemeClr val="accent1"/>
+          </a:lnRef>
+          <a:fillRef idx="3">
+            <a:schemeClr val="accent1"/>
+          </a:fillRef>
+          <a:effectRef idx="2">
+            <a:schemeClr val="accent1"/>
+          </a:effectRef>
+          <a:fontRef idx="minor">
+            <a:schemeClr val="lt1"/>
+          </a:fontRef>
+        </p:style>
+        <p:txBody>
+          <a:bodyPr rtlCol="0" anchor="ctr" wrap="square"/>
+          <a:lstStyle/>
+          <a:p>
+            <a:pPr algn="ctr"/>
+            <a:r>
+              <a:rPr sz="1250" b="1">
+                <a:solidFill>
+                  <a:srgbClr val="9B1C2E"/>
+                </a:solidFill>
+                <a:latin typeface="Georgia"/>
+              </a:rPr>
+              <a:t>Testing &amp; Build</a:t>
+            </a:r>
+          </a:p>
+          <a:p>
+            <a:pPr algn="ctr"/>
+            <a:r>
+              <a:rPr sz="1100" b="0">
                 <a:solidFill>
                   <a:srgbClr val="101010"/>
                 </a:solidFill>
                 <a:latin typeface="Calibri"/>
-                <a:ea typeface="Calibri"/>
-                <a:cs typeface="Calibri"/>
-                <a:sym typeface="Calibri"/>
-              </a:rPr>
-              <a:t>• Scheduling: AlarmManager (exact alarms), WorkManager, Boot receiver</a:t>
-            </a:r>
-            <a:endParaRPr sz="1100"/>
-          </a:p>
-          <a:p>
-            <a:pPr indent="0" lvl="0" marL="0" marR="0" rtl="0" algn="l">
-              <a:lnSpc>
-                <a:spcPct val="150000"/>
-              </a:lnSpc>
-              <a:spcBef>
-                <a:spcPts val="0"/>
-              </a:spcBef>
-              <a:spcAft>
-                <a:spcPts val="0"/>
-              </a:spcAft>
-              <a:buNone/>
-            </a:pPr>
-            <a:r>
-              <a:rPr b="0" i="0" lang="en" sz="1200" u="none" cap="none" strike="noStrike">
-                <a:solidFill>
-                  <a:srgbClr val="101010"/>
-                </a:solidFill>
-                <a:latin typeface="Calibri"/>
-                <a:ea typeface="Calibri"/>
-                <a:cs typeface="Calibri"/>
-                <a:sym typeface="Calibri"/>
-              </a:rPr>
-              <a:t>• Networking: Retrofit, OkHttp, kotlinx.serialization</a:t>
-            </a:r>
-            <a:endParaRPr sz="1100"/>
-          </a:p>
-          <a:p>
-            <a:pPr indent="0" lvl="0" marL="0" marR="0" rtl="0" algn="l">
-              <a:lnSpc>
-                <a:spcPct val="150000"/>
-              </a:lnSpc>
-              <a:spcBef>
-                <a:spcPts val="0"/>
-              </a:spcBef>
-              <a:spcAft>
-                <a:spcPts val="0"/>
-              </a:spcAft>
-              <a:buNone/>
-            </a:pPr>
-            <a:r>
-              <a:rPr b="0" i="0" lang="en" sz="1200" u="none" cap="none" strike="noStrike">
-                <a:solidFill>
-                  <a:srgbClr val="101010"/>
-                </a:solidFill>
-                <a:latin typeface="Calibri"/>
-                <a:ea typeface="Calibri"/>
-                <a:cs typeface="Calibri"/>
-                <a:sym typeface="Calibri"/>
-              </a:rPr>
-              <a:t>• Testing: JUnit, Robolectric, MockWebServer — 142 automated tests</a:t>
-            </a:r>
-            <a:endParaRPr sz="1100"/>
-          </a:p>
-          <a:p>
-            <a:pPr indent="0" lvl="0" marL="0" marR="0" rtl="0" algn="l">
-              <a:lnSpc>
-                <a:spcPct val="150000"/>
-              </a:lnSpc>
-              <a:spcBef>
-                <a:spcPts val="0"/>
-              </a:spcBef>
-              <a:spcAft>
-                <a:spcPts val="0"/>
-              </a:spcAft>
-              <a:buNone/>
-            </a:pPr>
-            <a:r>
-              <a:rPr b="0" i="0" lang="en" sz="1200" u="none" cap="none" strike="noStrike">
-                <a:solidFill>
-                  <a:srgbClr val="101010"/>
-                </a:solidFill>
-                <a:latin typeface="Calibri"/>
-                <a:ea typeface="Calibri"/>
-                <a:cs typeface="Calibri"/>
-                <a:sym typeface="Calibri"/>
-              </a:rPr>
-              <a:t>• Build: Gradle 8.11, Android Gradle Plugin 8.9, target API 36, minimum API 24</a:t>
-            </a:r>
-            <a:endParaRPr sz="1100"/>
+              </a:rPr>
+              <a:t>JUnit · Robolectric · Gradle · Target API 36</a:t>
+            </a:r>
+          </a:p>
+        </p:txBody>
+      </p:sp>
+      <p:sp>
+        <p:nvSpPr>
+          <p:cNvPr id="510" name="Oval 509"/>
+          <p:cNvSpPr/>
+          <p:nvPr/>
+        </p:nvSpPr>
+        <p:spPr>
+          <a:xfrm>
+            <a:off x="6583680" y="3255264"/>
+            <a:ext cx="347472" cy="347472"/>
+          </a:xfrm>
+          <a:prstGeom prst="ellipse">
+            <a:avLst/>
+          </a:prstGeom>
+          <a:solidFill>
+            <a:srgbClr val="101010"/>
+          </a:solidFill>
+          <a:ln>
+            <a:noFill/>
+          </a:ln>
+          <a:effectLst/>
+        </p:spPr>
+        <p:style>
+          <a:lnRef idx="1">
+            <a:schemeClr val="accent1"/>
+          </a:lnRef>
+          <a:fillRef idx="3">
+            <a:schemeClr val="accent1"/>
+          </a:fillRef>
+          <a:effectRef idx="2">
+            <a:schemeClr val="accent1"/>
+          </a:effectRef>
+          <a:fontRef idx="minor">
+            <a:schemeClr val="lt1"/>
+          </a:fontRef>
+        </p:style>
+        <p:txBody>
+          <a:bodyPr rtlCol="0" anchor="ctr" wrap="square" lIns="73152" rIns="73152" tIns="36576" bIns="36576"/>
+          <a:lstStyle/>
+          <a:p>
+            <a:pPr algn="ctr">
+              <a:spcAft>
+                <a:spcPts val="0"/>
+              </a:spcAft>
+            </a:pPr>
+            <a:r>
+              <a:rPr sz="1200" b="1">
+                <a:solidFill>
+                  <a:srgbClr val="FFFFFF"/>
+                </a:solidFill>
+                <a:latin typeface="Georgia"/>
+              </a:rPr>
+              <a:t>6</a:t>
+            </a:r>
           </a:p>
         </p:txBody>
       </p:sp>
@@ -39141,324 +39604,405 @@
       </p:sp>
       <p:sp>
         <p:nvSpPr>
-          <p:cNvPr id="499" name="Google Shape;499;p48"/>
-          <p:cNvSpPr txBox="1"/>
+          <p:cNvPr id="499" name="Rounded Rectangle 498"/>
+          <p:cNvSpPr/>
           <p:nvPr/>
         </p:nvSpPr>
         <p:spPr>
           <a:xfrm>
-            <a:off x="480073" y="891540"/>
-            <a:ext cx="8229819" cy="3771900"/>
-          </a:xfrm>
-          <a:prstGeom prst="rect">
-            <a:avLst/>
-          </a:prstGeom>
-          <a:noFill/>
+            <a:off x="484632" y="1024128"/>
+            <a:ext cx="4114800" cy="484632"/>
+          </a:xfrm>
+          <a:prstGeom prst="roundRect">
+            <a:avLst/>
+          </a:prstGeom>
+          <a:solidFill>
+            <a:srgbClr val="9B1C2E"/>
+          </a:solidFill>
           <a:ln>
             <a:noFill/>
           </a:ln>
-        </p:spPr>
-        <p:txBody>
-          <a:bodyPr anchorCtr="0" anchor="t" bIns="34275" lIns="68575" spcFirstLastPara="1" rIns="68575" wrap="square" tIns="34275">
-            <a:spAutoFit/>
-          </a:bodyPr>
+          <a:effectLst/>
+        </p:spPr>
+        <p:style>
+          <a:lnRef idx="1">
+            <a:schemeClr val="accent1"/>
+          </a:lnRef>
+          <a:fillRef idx="3">
+            <a:schemeClr val="accent1"/>
+          </a:fillRef>
+          <a:effectRef idx="2">
+            <a:schemeClr val="accent1"/>
+          </a:effectRef>
+          <a:fontRef idx="minor">
+            <a:schemeClr val="lt1"/>
+          </a:fontRef>
+        </p:style>
+        <p:txBody>
+          <a:bodyPr rtlCol="0" anchor="ctr" wrap="square" lIns="73152" rIns="73152" tIns="36576" bIns="36576"/>
           <a:lstStyle/>
           <a:p>
-            <a:pPr indent="0" lvl="0" marL="0" marR="0" rtl="0" algn="l">
-              <a:lnSpc>
-                <a:spcPct val="150000"/>
-              </a:lnSpc>
-              <a:spcBef>
-                <a:spcPts val="0"/>
-              </a:spcBef>
-              <a:spcAft>
-                <a:spcPts val="0"/>
-              </a:spcAft>
-              <a:buNone/>
-            </a:pPr>
-            <a:r>
-              <a:rPr b="0" i="0" lang="en" sz="1100" u="none" cap="none" strike="noStrike">
+            <a:pPr algn="ctr">
+              <a:spcAft>
+                <a:spcPts val="0"/>
+              </a:spcAft>
+            </a:pPr>
+            <a:r>
+              <a:rPr sz="1600" b="1">
+                <a:solidFill>
+                  <a:srgbClr val="FFFFFF"/>
+                </a:solidFill>
+                <a:latin typeface="Georgia"/>
+              </a:rPr>
+              <a:t>Features Delivered</a:t>
+            </a:r>
+          </a:p>
+        </p:txBody>
+      </p:sp>
+      <p:sp>
+        <p:nvSpPr>
+          <p:cNvPr id="500" name="Rounded Rectangle 499"/>
+          <p:cNvSpPr/>
+          <p:nvPr/>
+        </p:nvSpPr>
+        <p:spPr>
+          <a:xfrm>
+            <a:off x="484632" y="1508760"/>
+            <a:ext cx="4114800" cy="2880360"/>
+          </a:xfrm>
+          <a:prstGeom prst="roundRect">
+            <a:avLst/>
+          </a:prstGeom>
+          <a:solidFill>
+            <a:srgbClr val="FFFFFF"/>
+          </a:solidFill>
+          <a:ln>
+            <a:noFill/>
+          </a:ln>
+          <a:effectLst/>
+        </p:spPr>
+        <p:style>
+          <a:lnRef idx="1">
+            <a:schemeClr val="accent1"/>
+          </a:lnRef>
+          <a:fillRef idx="3">
+            <a:schemeClr val="accent1"/>
+          </a:fillRef>
+          <a:effectRef idx="2">
+            <a:schemeClr val="accent1"/>
+          </a:effectRef>
+          <a:fontRef idx="minor">
+            <a:schemeClr val="lt1"/>
+          </a:fontRef>
+        </p:style>
+        <p:txBody>
+          <a:bodyPr rtlCol="0" anchor="t" wrap="square" lIns="73152" rIns="73152" tIns="36576" bIns="36576"/>
+          <a:lstStyle/>
+          <a:p>
+            <a:pPr algn="l">
+              <a:spcAft>
+                <a:spcPts val="400"/>
+              </a:spcAft>
+            </a:pPr>
+            <a:r>
+              <a:rPr sz="1100" b="0">
                 <a:solidFill>
                   <a:srgbClr val="101010"/>
                 </a:solidFill>
                 <a:latin typeface="Calibri"/>
-                <a:ea typeface="Calibri"/>
-                <a:cs typeface="Calibri"/>
-                <a:sym typeface="Calibri"/>
-              </a:rPr>
-              <a:t>• Replaced phone-OTP login with Google Sign-In for both user roles</a:t>
-            </a:r>
-            <a:endParaRPr sz="1100"/>
-          </a:p>
-          <a:p>
-            <a:pPr indent="0" lvl="0" marL="0" marR="0" rtl="0" algn="l">
-              <a:lnSpc>
-                <a:spcPct val="150000"/>
-              </a:lnSpc>
-              <a:spcBef>
-                <a:spcPts val="0"/>
-              </a:spcBef>
-              <a:spcAft>
-                <a:spcPts val="0"/>
-              </a:spcAft>
-              <a:buNone/>
-            </a:pPr>
-            <a:r>
-              <a:rPr b="0" i="0" lang="en" sz="1100" u="none" cap="none" strike="noStrike">
+              </a:rPr>
+              <a:t>• Google Sign-In replacing phone OTP, for both roles</a:t>
+            </a:r>
+          </a:p>
+          <a:p>
+            <a:pPr algn="l">
+              <a:spcAft>
+                <a:spcPts val="400"/>
+              </a:spcAft>
+            </a:pPr>
+            <a:r>
+              <a:rPr sz="1100" b="0">
                 <a:solidFill>
                   <a:srgbClr val="101010"/>
                 </a:solidFill>
                 <a:latin typeface="Calibri"/>
-                <a:ea typeface="Calibri"/>
-                <a:cs typeface="Calibri"/>
-                <a:sym typeface="Calibri"/>
-              </a:rPr>
-              <a:t>• Added single-use invite codes to bind an elder's device to a care profile</a:t>
-            </a:r>
-            <a:endParaRPr sz="1100"/>
-          </a:p>
-          <a:p>
-            <a:pPr indent="0" lvl="0" marL="0" marR="0" rtl="0" algn="l">
-              <a:lnSpc>
-                <a:spcPct val="150000"/>
-              </a:lnSpc>
-              <a:spcBef>
-                <a:spcPts val="0"/>
-              </a:spcBef>
-              <a:spcAft>
-                <a:spcPts val="0"/>
-              </a:spcAft>
-              <a:buNone/>
-            </a:pPr>
-            <a:r>
-              <a:rPr b="0" i="0" lang="en" sz="1100" u="none" cap="none" strike="noStrike">
+              </a:rPr>
+              <a:t>• Single-use invite codes binding an elder's device</a:t>
+            </a:r>
+          </a:p>
+          <a:p>
+            <a:pPr algn="l">
+              <a:spcAft>
+                <a:spcPts val="400"/>
+              </a:spcAft>
+            </a:pPr>
+            <a:r>
+              <a:rPr sz="1100" b="0">
                 <a:solidFill>
                   <a:srgbClr val="101010"/>
                 </a:solidFill>
                 <a:latin typeface="Calibri"/>
-                <a:ea typeface="Calibri"/>
-                <a:cs typeface="Calibri"/>
-                <a:sym typeface="Calibri"/>
-              </a:rPr>
-              <a:t>• Completed guardian modules: medicines, schedules, reminders, vitals, adherence,</a:t>
-            </a:r>
-            <a:endParaRPr sz="1100"/>
-          </a:p>
-          <a:p>
-            <a:pPr indent="0" lvl="0" marL="0" marR="0" rtl="0" algn="l">
-              <a:lnSpc>
-                <a:spcPct val="150000"/>
-              </a:lnSpc>
-              <a:spcBef>
-                <a:spcPts val="0"/>
-              </a:spcBef>
-              <a:spcAft>
-                <a:spcPts val="0"/>
-              </a:spcAft>
-              <a:buNone/>
-            </a:pPr>
-            <a:r>
-              <a:rPr b="0" i="0" lang="en" sz="1100" u="none" cap="none" strike="noStrike">
+              </a:rPr>
+              <a:t>• Guardian: medicines, schedules, reminders, vitals,</a:t>
+            </a:r>
+          </a:p>
+          <a:p>
+            <a:pPr algn="l">
+              <a:spcAft>
+                <a:spcPts val="400"/>
+              </a:spcAft>
+            </a:pPr>
+            <a:r>
+              <a:rPr sz="1100" b="0">
                 <a:solidFill>
                   <a:srgbClr val="101010"/>
                 </a:solidFill>
                 <a:latin typeface="Calibri"/>
-                <a:ea typeface="Calibri"/>
-                <a:cs typeface="Calibri"/>
-                <a:sym typeface="Calibri"/>
-              </a:rPr>
-              <a:t>   contacts, family access, SOS monitoring and media shortcuts</a:t>
-            </a:r>
-            <a:endParaRPr sz="1100"/>
-          </a:p>
-          <a:p>
-            <a:pPr indent="0" lvl="0" marL="0" marR="0" rtl="0" algn="l">
-              <a:lnSpc>
-                <a:spcPct val="150000"/>
-              </a:lnSpc>
-              <a:spcBef>
-                <a:spcPts val="0"/>
-              </a:spcBef>
-              <a:spcAft>
-                <a:spcPts val="0"/>
-              </a:spcAft>
-              <a:buNone/>
-            </a:pPr>
-            <a:r>
-              <a:rPr b="0" i="0" lang="en" sz="1100" u="none" cap="none" strike="noStrike">
+              </a:rPr>
+              <a:t>   adherence, contacts, family access, SOS monitor</a:t>
+            </a:r>
+          </a:p>
+          <a:p>
+            <a:pPr algn="l">
+              <a:spcAft>
+                <a:spcPts val="400"/>
+              </a:spcAft>
+            </a:pPr>
+            <a:r>
+              <a:rPr sz="1100" b="0">
                 <a:solidFill>
                   <a:srgbClr val="101010"/>
                 </a:solidFill>
                 <a:latin typeface="Calibri"/>
-                <a:ea typeface="Calibri"/>
-                <a:cs typeface="Calibri"/>
-                <a:sym typeface="Calibri"/>
-              </a:rPr>
-              <a:t>• Completed elder modules: home, medicines, contacts, vitals, videos and settings</a:t>
-            </a:r>
-            <a:endParaRPr sz="1100"/>
-          </a:p>
-          <a:p>
-            <a:pPr indent="0" lvl="0" marL="0" marR="0" rtl="0" algn="l">
-              <a:lnSpc>
-                <a:spcPct val="150000"/>
-              </a:lnSpc>
-              <a:spcBef>
-                <a:spcPts val="0"/>
-              </a:spcBef>
-              <a:spcAft>
-                <a:spcPts val="0"/>
-              </a:spcAft>
-              <a:buNone/>
-            </a:pPr>
-            <a:r>
-              <a:rPr b="0" i="0" lang="en" sz="1100" u="none" cap="none" strike="noStrike">
+              </a:rPr>
+              <a:t>• Elder: home, medicines, contacts, vitals, videos</a:t>
+            </a:r>
+          </a:p>
+          <a:p>
+            <a:pPr algn="l">
+              <a:spcAft>
+                <a:spcPts val="400"/>
+              </a:spcAft>
+            </a:pPr>
+            <a:r>
+              <a:rPr sz="1100" b="0">
                 <a:solidFill>
                   <a:srgbClr val="101010"/>
                 </a:solidFill>
                 <a:latin typeface="Calibri"/>
-                <a:ea typeface="Calibri"/>
-                <a:cs typeface="Calibri"/>
-                <a:sym typeface="Calibri"/>
-              </a:rPr>
-              <a:t>   with four languages, three text sizes and a high-contrast mode</a:t>
-            </a:r>
-            <a:endParaRPr sz="1100"/>
-          </a:p>
-          <a:p>
-            <a:pPr indent="0" lvl="0" marL="0" marR="0" rtl="0" algn="l">
-              <a:lnSpc>
-                <a:spcPct val="150000"/>
-              </a:lnSpc>
-              <a:spcBef>
-                <a:spcPts val="0"/>
-              </a:spcBef>
-              <a:spcAft>
-                <a:spcPts val="0"/>
-              </a:spcAft>
-              <a:buNone/>
-            </a:pPr>
-            <a:r>
-              <a:rPr b="0" i="0" lang="en" sz="1100" u="none" cap="none" strike="noStrike">
+              </a:rPr>
+              <a:t>• Four languages, three text sizes, high contrast</a:t>
+            </a:r>
+          </a:p>
+        </p:txBody>
+      </p:sp>
+      <p:sp>
+        <p:nvSpPr>
+          <p:cNvPr id="501" name="Rounded Rectangle 500"/>
+          <p:cNvSpPr/>
+          <p:nvPr/>
+        </p:nvSpPr>
+        <p:spPr>
+          <a:xfrm>
+            <a:off x="4599432" y="1024128"/>
+            <a:ext cx="4114800" cy="484632"/>
+          </a:xfrm>
+          <a:prstGeom prst="roundRect">
+            <a:avLst/>
+          </a:prstGeom>
+          <a:solidFill>
+            <a:srgbClr val="9B1C2E"/>
+          </a:solidFill>
+          <a:ln>
+            <a:noFill/>
+          </a:ln>
+          <a:effectLst/>
+        </p:spPr>
+        <p:style>
+          <a:lnRef idx="1">
+            <a:schemeClr val="accent1"/>
+          </a:lnRef>
+          <a:fillRef idx="3">
+            <a:schemeClr val="accent1"/>
+          </a:fillRef>
+          <a:effectRef idx="2">
+            <a:schemeClr val="accent1"/>
+          </a:effectRef>
+          <a:fontRef idx="minor">
+            <a:schemeClr val="lt1"/>
+          </a:fontRef>
+        </p:style>
+        <p:txBody>
+          <a:bodyPr rtlCol="0" anchor="ctr" wrap="square" lIns="73152" rIns="73152" tIns="36576" bIns="36576"/>
+          <a:lstStyle/>
+          <a:p>
+            <a:pPr algn="ctr">
+              <a:spcAft>
+                <a:spcPts val="0"/>
+              </a:spcAft>
+            </a:pPr>
+            <a:r>
+              <a:rPr sz="1600" b="1">
+                <a:solidFill>
+                  <a:srgbClr val="FFFFFF"/>
+                </a:solidFill>
+                <a:latin typeface="Georgia"/>
+              </a:rPr>
+              <a:t>Engineering &amp; Quality</a:t>
+            </a:r>
+          </a:p>
+        </p:txBody>
+      </p:sp>
+      <p:sp>
+        <p:nvSpPr>
+          <p:cNvPr id="502" name="Rounded Rectangle 501"/>
+          <p:cNvSpPr/>
+          <p:nvPr/>
+        </p:nvSpPr>
+        <p:spPr>
+          <a:xfrm>
+            <a:off x="4599432" y="1508760"/>
+            <a:ext cx="4114800" cy="2880360"/>
+          </a:xfrm>
+          <a:prstGeom prst="roundRect">
+            <a:avLst/>
+          </a:prstGeom>
+          <a:solidFill>
+            <a:srgbClr val="FFFFFF"/>
+          </a:solidFill>
+          <a:ln>
+            <a:noFill/>
+          </a:ln>
+          <a:effectLst/>
+        </p:spPr>
+        <p:style>
+          <a:lnRef idx="1">
+            <a:schemeClr val="accent1"/>
+          </a:lnRef>
+          <a:fillRef idx="3">
+            <a:schemeClr val="accent1"/>
+          </a:fillRef>
+          <a:effectRef idx="2">
+            <a:schemeClr val="accent1"/>
+          </a:effectRef>
+          <a:fontRef idx="minor">
+            <a:schemeClr val="lt1"/>
+          </a:fontRef>
+        </p:style>
+        <p:txBody>
+          <a:bodyPr rtlCol="0" anchor="t" wrap="square" lIns="73152" rIns="73152" tIns="36576" bIns="36576"/>
+          <a:lstStyle/>
+          <a:p>
+            <a:pPr algn="l">
+              <a:spcAft>
+                <a:spcPts val="400"/>
+              </a:spcAft>
+            </a:pPr>
+            <a:r>
+              <a:rPr sz="1100" b="0">
                 <a:solidFill>
                   <a:srgbClr val="101010"/>
                 </a:solidFill>
                 <a:latin typeface="Calibri"/>
-                <a:ea typeface="Calibri"/>
-                <a:cs typeface="Calibri"/>
-                <a:sym typeface="Calibri"/>
-              </a:rPr>
-              <a:t>• Backend deployed: 17 tables, 33 row-level security policies, scheduled missed-dose scan</a:t>
-            </a:r>
-            <a:endParaRPr sz="1100"/>
-          </a:p>
-          <a:p>
-            <a:pPr indent="0" lvl="0" marL="0" marR="0" rtl="0" algn="l">
-              <a:lnSpc>
-                <a:spcPct val="150000"/>
-              </a:lnSpc>
-              <a:spcBef>
-                <a:spcPts val="0"/>
-              </a:spcBef>
-              <a:spcAft>
-                <a:spcPts val="0"/>
-              </a:spcAft>
-              <a:buNone/>
-            </a:pPr>
-            <a:r>
-              <a:rPr b="0" i="0" lang="en" sz="1100" u="none" cap="none" strike="noStrike">
+              </a:rPr>
+              <a:t>• Backend live: 17 tables, 33 access policies</a:t>
+            </a:r>
+          </a:p>
+          <a:p>
+            <a:pPr algn="l">
+              <a:spcAft>
+                <a:spcPts val="400"/>
+              </a:spcAft>
+            </a:pPr>
+            <a:r>
+              <a:rPr sz="1100" b="0">
                 <a:solidFill>
                   <a:srgbClr val="101010"/>
                 </a:solidFill>
                 <a:latin typeface="Calibri"/>
-                <a:ea typeface="Calibri"/>
-                <a:cs typeface="Calibri"/>
-                <a:sym typeface="Calibri"/>
-              </a:rPr>
-              <a:t>• Reliability work: three-path reminder arming, offline adherence queue, fail-honest SOS</a:t>
-            </a:r>
-            <a:endParaRPr sz="1100"/>
-          </a:p>
-          <a:p>
-            <a:pPr indent="0" lvl="0" marL="0" marR="0" rtl="0" algn="l">
-              <a:lnSpc>
-                <a:spcPct val="150000"/>
-              </a:lnSpc>
-              <a:spcBef>
-                <a:spcPts val="0"/>
-              </a:spcBef>
-              <a:spcAft>
-                <a:spcPts val="0"/>
-              </a:spcAft>
-              <a:buNone/>
-            </a:pPr>
-            <a:r>
-              <a:rPr b="0" i="0" lang="en" sz="1100" u="none" cap="none" strike="noStrike">
+              </a:rPr>
+              <a:t>• Three-path reminder arming (app, worker, boot)</a:t>
+            </a:r>
+          </a:p>
+          <a:p>
+            <a:pPr algn="l">
+              <a:spcAft>
+                <a:spcPts val="400"/>
+              </a:spcAft>
+            </a:pPr>
+            <a:r>
+              <a:rPr sz="1100" b="0">
                 <a:solidFill>
                   <a:srgbClr val="101010"/>
                 </a:solidFill>
                 <a:latin typeface="Calibri"/>
-                <a:ea typeface="Calibri"/>
-                <a:cs typeface="Calibri"/>
-                <a:sym typeface="Calibri"/>
-              </a:rPr>
-              <a:t>• 142 automated tests written; Android Lint clean at release configuration</a:t>
-            </a:r>
-            <a:endParaRPr sz="1100"/>
-          </a:p>
-          <a:p>
-            <a:pPr indent="0" lvl="0" marL="0" marR="0" rtl="0" algn="l">
-              <a:lnSpc>
-                <a:spcPct val="150000"/>
-              </a:lnSpc>
-              <a:spcBef>
-                <a:spcPts val="0"/>
-              </a:spcBef>
-              <a:spcAft>
-                <a:spcPts val="0"/>
-              </a:spcAft>
-              <a:buNone/>
-            </a:pPr>
-            <a:r>
-              <a:rPr b="0" i="0" lang="en" sz="1100" u="none" cap="none" strike="noStrike">
+              </a:rPr>
+              <a:t>• Offline adherence queue with later sync</a:t>
+            </a:r>
+          </a:p>
+          <a:p>
+            <a:pPr algn="l">
+              <a:spcAft>
+                <a:spcPts val="400"/>
+              </a:spcAft>
+            </a:pPr>
+            <a:r>
+              <a:rPr sz="1100" b="0">
                 <a:solidFill>
                   <a:srgbClr val="101010"/>
                 </a:solidFill>
                 <a:latin typeface="Calibri"/>
-                <a:ea typeface="Calibri"/>
-                <a:cs typeface="Calibri"/>
-                <a:sym typeface="Calibri"/>
-              </a:rPr>
-              <a:t>• Play-readiness: target API 36, signed release build, restricted permissions removed</a:t>
-            </a:r>
-            <a:endParaRPr sz="1100"/>
-          </a:p>
-          <a:p>
-            <a:pPr indent="0" lvl="0" marL="0" marR="0" rtl="0" algn="l">
-              <a:lnSpc>
-                <a:spcPct val="150000"/>
-              </a:lnSpc>
-              <a:spcBef>
-                <a:spcPts val="0"/>
-              </a:spcBef>
-              <a:spcAft>
-                <a:spcPts val="0"/>
-              </a:spcAft>
-              <a:buNone/>
-            </a:pPr>
-            <a:r>
-              <a:rPr b="0" i="0" lang="en" sz="1100" u="none" cap="none" strike="noStrike">
+              </a:rPr>
+              <a:t>• Fail-honest SOS with user-mediated fallback</a:t>
+            </a:r>
+          </a:p>
+          <a:p>
+            <a:pPr algn="l">
+              <a:spcAft>
+                <a:spcPts val="400"/>
+              </a:spcAft>
+            </a:pPr>
+            <a:r>
+              <a:rPr sz="1100" b="0">
                 <a:solidFill>
                   <a:srgbClr val="101010"/>
                 </a:solidFill>
                 <a:latin typeface="Calibri"/>
-                <a:ea typeface="Calibri"/>
-                <a:cs typeface="Calibri"/>
-                <a:sym typeface="Calibri"/>
-              </a:rPr>
-              <a:t>• IEEE-format research paper drafted (7 pages, 21 references)</a:t>
-            </a:r>
-            <a:endParaRPr sz="1100"/>
+              </a:rPr>
+              <a:t>• 142 automated tests · Lint clean</a:t>
+            </a:r>
+          </a:p>
+          <a:p>
+            <a:pPr algn="l">
+              <a:spcAft>
+                <a:spcPts val="400"/>
+              </a:spcAft>
+            </a:pPr>
+            <a:r>
+              <a:rPr sz="1100" b="0">
+                <a:solidFill>
+                  <a:srgbClr val="101010"/>
+                </a:solidFill>
+                <a:latin typeface="Calibri"/>
+              </a:rPr>
+              <a:t>• Play-ready: API 36, signed build, no restricted</a:t>
+            </a:r>
+          </a:p>
+          <a:p>
+            <a:pPr algn="l">
+              <a:spcAft>
+                <a:spcPts val="400"/>
+              </a:spcAft>
+            </a:pPr>
+            <a:r>
+              <a:rPr sz="1100" b="0">
+                <a:solidFill>
+                  <a:srgbClr val="101010"/>
+                </a:solidFill>
+                <a:latin typeface="Calibri"/>
+              </a:rPr>
+              <a:t>   permissions</a:t>
+            </a:r>
           </a:p>
         </p:txBody>
       </p:sp>
@@ -39856,351 +40400,391 @@
       </p:sp>
       <p:sp>
         <p:nvSpPr>
-          <p:cNvPr id="499" name="Google Shape;499;p48"/>
-          <p:cNvSpPr txBox="1"/>
+          <p:cNvPr id="499" name="Rounded Rectangle 498"/>
+          <p:cNvSpPr/>
           <p:nvPr/>
         </p:nvSpPr>
         <p:spPr>
           <a:xfrm>
-            <a:off x="480073" y="891540"/>
-            <a:ext cx="8229819" cy="3771900"/>
-          </a:xfrm>
-          <a:prstGeom prst="rect">
-            <a:avLst/>
-          </a:prstGeom>
-          <a:noFill/>
+            <a:off x="484632" y="960120"/>
+            <a:ext cx="3840480" cy="1024128"/>
+          </a:xfrm>
+          <a:prstGeom prst="roundRect">
+            <a:avLst/>
+          </a:prstGeom>
+          <a:solidFill>
+            <a:srgbClr val="FFFFFF"/>
+          </a:solidFill>
           <a:ln>
             <a:noFill/>
           </a:ln>
-        </p:spPr>
-        <p:txBody>
-          <a:bodyPr anchorCtr="0" anchor="t" bIns="34275" lIns="68575" spcFirstLastPara="1" rIns="68575" wrap="square" tIns="34275">
-            <a:spAutoFit/>
-          </a:bodyPr>
+          <a:effectLst/>
+        </p:spPr>
+        <p:style>
+          <a:lnRef idx="1">
+            <a:schemeClr val="accent1"/>
+          </a:lnRef>
+          <a:fillRef idx="3">
+            <a:schemeClr val="accent1"/>
+          </a:fillRef>
+          <a:effectRef idx="2">
+            <a:schemeClr val="accent1"/>
+          </a:effectRef>
+          <a:fontRef idx="minor">
+            <a:schemeClr val="lt1"/>
+          </a:fontRef>
+        </p:style>
+        <p:txBody>
+          <a:bodyPr rtlCol="0" anchor="ctr" wrap="square"/>
           <a:lstStyle/>
           <a:p>
-            <a:pPr indent="0" lvl="0" marL="0" marR="0" rtl="0" algn="l">
-              <a:lnSpc>
-                <a:spcPct val="150000"/>
-              </a:lnSpc>
-              <a:spcBef>
-                <a:spcPts val="0"/>
-              </a:spcBef>
-              <a:spcAft>
-                <a:spcPts val="0"/>
-              </a:spcAft>
-              <a:buNone/>
-            </a:pPr>
-            <a:r>
-              <a:rPr b="0" i="0" lang="en" sz="1100" u="none" cap="none" strike="noStrike">
+            <a:pPr algn="ctr"/>
+            <a:r>
+              <a:rPr sz="2000" b="1">
+                <a:solidFill>
+                  <a:srgbClr val="9B1C2E"/>
+                </a:solidFill>
+                <a:latin typeface="Georgia"/>
+              </a:rPr>
+              <a:t>20 sp vs 13 sp</a:t>
+            </a:r>
+          </a:p>
+          <a:p>
+            <a:pPr algn="ctr"/>
+            <a:r>
+              <a:rPr sz="1100">
                 <a:solidFill>
                   <a:srgbClr val="101010"/>
                 </a:solidFill>
                 <a:latin typeface="Calibri"/>
-                <a:ea typeface="Calibri"/>
-                <a:cs typeface="Calibri"/>
-                <a:sym typeface="Calibri"/>
-              </a:rPr>
-              <a:t>• Functional application running on physical Android devices; medicine reminders</a:t>
-            </a:r>
-            <a:endParaRPr sz="1100"/>
-          </a:p>
-          <a:p>
-            <a:pPr indent="0" lvl="0" marL="0" marR="0" rtl="0" algn="l">
-              <a:lnSpc>
-                <a:spcPct val="150000"/>
-              </a:lnSpc>
-              <a:spcBef>
-                <a:spcPts val="0"/>
-              </a:spcBef>
-              <a:spcAft>
-                <a:spcPts val="0"/>
-              </a:spcAft>
-              <a:buNone/>
-            </a:pPr>
-            <a:r>
-              <a:rPr b="0" i="0" lang="en" sz="1100" u="none" cap="none" strike="noStrike">
+              </a:rPr>
+              <a:t>Median text size: elder vs guardian interface</a:t>
+            </a:r>
+          </a:p>
+        </p:txBody>
+      </p:sp>
+      <p:sp>
+        <p:nvSpPr>
+          <p:cNvPr id="500" name="Rounded Rectangle 499"/>
+          <p:cNvSpPr/>
+          <p:nvPr/>
+        </p:nvSpPr>
+        <p:spPr>
+          <a:xfrm>
+            <a:off x="4800600" y="960120"/>
+            <a:ext cx="3840480" cy="1024128"/>
+          </a:xfrm>
+          <a:prstGeom prst="roundRect">
+            <a:avLst/>
+          </a:prstGeom>
+          <a:solidFill>
+            <a:srgbClr val="FFFFFF"/>
+          </a:solidFill>
+          <a:ln>
+            <a:noFill/>
+          </a:ln>
+          <a:effectLst/>
+        </p:spPr>
+        <p:style>
+          <a:lnRef idx="1">
+            <a:schemeClr val="accent1"/>
+          </a:lnRef>
+          <a:fillRef idx="3">
+            <a:schemeClr val="accent1"/>
+          </a:fillRef>
+          <a:effectRef idx="2">
+            <a:schemeClr val="accent1"/>
+          </a:effectRef>
+          <a:fontRef idx="minor">
+            <a:schemeClr val="lt1"/>
+          </a:fontRef>
+        </p:style>
+        <p:txBody>
+          <a:bodyPr rtlCol="0" anchor="ctr" wrap="square"/>
+          <a:lstStyle/>
+          <a:p>
+            <a:pPr algn="ctr"/>
+            <a:r>
+              <a:rPr sz="2000" b="1">
+                <a:solidFill>
+                  <a:srgbClr val="9B1C2E"/>
+                </a:solidFill>
+                <a:latin typeface="Georgia"/>
+              </a:rPr>
+              <a:t>64 dp minimum</a:t>
+            </a:r>
+          </a:p>
+          <a:p>
+            <a:pPr algn="ctr"/>
+            <a:r>
+              <a:rPr sz="1100">
                 <a:solidFill>
                   <a:srgbClr val="101010"/>
                 </a:solidFill>
                 <a:latin typeface="Calibri"/>
-                <a:ea typeface="Calibri"/>
-                <a:cs typeface="Calibri"/>
-                <a:sym typeface="Calibri"/>
-              </a:rPr>
-              <a:t>   verified firing at the scheduled time on device</a:t>
-            </a:r>
-            <a:endParaRPr sz="1100"/>
-          </a:p>
-          <a:p>
-            <a:pPr indent="0" lvl="0" marL="0" marR="0" rtl="0" algn="l">
-              <a:lnSpc>
-                <a:spcPct val="150000"/>
-              </a:lnSpc>
-              <a:spcBef>
-                <a:spcPts val="0"/>
-              </a:spcBef>
-              <a:spcAft>
-                <a:spcPts val="0"/>
-              </a:spcAft>
-              <a:buNone/>
-            </a:pPr>
-            <a:r>
-              <a:rPr b="0" i="0" lang="en" sz="1100" u="none" cap="none" strike="noStrike">
+              </a:rPr>
+              <a:t>Every primary control, against a 48 dp standard</a:t>
+            </a:r>
+          </a:p>
+        </p:txBody>
+      </p:sp>
+      <p:sp>
+        <p:nvSpPr>
+          <p:cNvPr id="501" name="Rounded Rectangle 500"/>
+          <p:cNvSpPr/>
+          <p:nvPr/>
+        </p:nvSpPr>
+        <p:spPr>
+          <a:xfrm>
+            <a:off x="484632" y="2194560"/>
+            <a:ext cx="3840480" cy="1024128"/>
+          </a:xfrm>
+          <a:prstGeom prst="roundRect">
+            <a:avLst/>
+          </a:prstGeom>
+          <a:solidFill>
+            <a:srgbClr val="FFFFFF"/>
+          </a:solidFill>
+          <a:ln>
+            <a:noFill/>
+          </a:ln>
+          <a:effectLst/>
+        </p:spPr>
+        <p:style>
+          <a:lnRef idx="1">
+            <a:schemeClr val="accent1"/>
+          </a:lnRef>
+          <a:fillRef idx="3">
+            <a:schemeClr val="accent1"/>
+          </a:fillRef>
+          <a:effectRef idx="2">
+            <a:schemeClr val="accent1"/>
+          </a:effectRef>
+          <a:fontRef idx="minor">
+            <a:schemeClr val="lt1"/>
+          </a:fontRef>
+        </p:style>
+        <p:txBody>
+          <a:bodyPr rtlCol="0" anchor="ctr" wrap="square"/>
+          <a:lstStyle/>
+          <a:p>
+            <a:pPr algn="ctr"/>
+            <a:r>
+              <a:rPr sz="2000" b="1">
+                <a:solidFill>
+                  <a:srgbClr val="9B1C2E"/>
+                </a:solidFill>
+                <a:latin typeface="Georgia"/>
+              </a:rPr>
+              <a:t>1 tap</a:t>
+            </a:r>
+          </a:p>
+          <a:p>
+            <a:pPr algn="ctr"/>
+            <a:r>
+              <a:rPr sz="1100">
                 <a:solidFill>
                   <a:srgbClr val="101010"/>
                 </a:solidFill>
                 <a:latin typeface="Calibri"/>
-                <a:ea typeface="Calibri"/>
-                <a:cs typeface="Calibri"/>
-                <a:sym typeface="Calibri"/>
-              </a:rPr>
-              <a:t>• Elder interface measured directly from source code:</a:t>
-            </a:r>
-            <a:endParaRPr sz="1100"/>
-          </a:p>
-          <a:p>
-            <a:pPr indent="0" lvl="0" marL="0" marR="0" rtl="0" algn="l">
-              <a:lnSpc>
-                <a:spcPct val="150000"/>
-              </a:lnSpc>
-              <a:spcBef>
-                <a:spcPts val="0"/>
-              </a:spcBef>
-              <a:spcAft>
-                <a:spcPts val="0"/>
-              </a:spcAft>
-              <a:buNone/>
-            </a:pPr>
-            <a:r>
-              <a:rPr b="0" i="0" lang="en" sz="1100" u="none" cap="none" strike="noStrike">
+              </a:rPr>
+              <a:t>To raise an emergency alarm</a:t>
+            </a:r>
+          </a:p>
+        </p:txBody>
+      </p:sp>
+      <p:sp>
+        <p:nvSpPr>
+          <p:cNvPr id="502" name="Rounded Rectangle 501"/>
+          <p:cNvSpPr/>
+          <p:nvPr/>
+        </p:nvSpPr>
+        <p:spPr>
+          <a:xfrm>
+            <a:off x="4800600" y="2194560"/>
+            <a:ext cx="3840480" cy="1024128"/>
+          </a:xfrm>
+          <a:prstGeom prst="roundRect">
+            <a:avLst/>
+          </a:prstGeom>
+          <a:solidFill>
+            <a:srgbClr val="FFFFFF"/>
+          </a:solidFill>
+          <a:ln>
+            <a:noFill/>
+          </a:ln>
+          <a:effectLst/>
+        </p:spPr>
+        <p:style>
+          <a:lnRef idx="1">
+            <a:schemeClr val="accent1"/>
+          </a:lnRef>
+          <a:fillRef idx="3">
+            <a:schemeClr val="accent1"/>
+          </a:fillRef>
+          <a:effectRef idx="2">
+            <a:schemeClr val="accent1"/>
+          </a:effectRef>
+          <a:fontRef idx="minor">
+            <a:schemeClr val="lt1"/>
+          </a:fontRef>
+        </p:style>
+        <p:txBody>
+          <a:bodyPr rtlCol="0" anchor="ctr" wrap="square"/>
+          <a:lstStyle/>
+          <a:p>
+            <a:pPr algn="ctr"/>
+            <a:r>
+              <a:rPr sz="2000" b="1">
+                <a:solidFill>
+                  <a:srgbClr val="9B1C2E"/>
+                </a:solidFill>
+                <a:latin typeface="Georgia"/>
+              </a:rPr>
+              <a:t>3 taps</a:t>
+            </a:r>
+          </a:p>
+          <a:p>
+            <a:pPr algn="ctr"/>
+            <a:r>
+              <a:rPr sz="1100">
                 <a:solidFill>
                   <a:srgbClr val="101010"/>
                 </a:solidFill>
                 <a:latin typeface="Calibri"/>
-                <a:ea typeface="Calibri"/>
-                <a:cs typeface="Calibri"/>
-                <a:sym typeface="Calibri"/>
-              </a:rPr>
-              <a:t>   – Median declared text size 20 sp, against 13 sp on the guardian interface</a:t>
-            </a:r>
-            <a:endParaRPr sz="1100"/>
-          </a:p>
-          <a:p>
-            <a:pPr indent="0" lvl="0" marL="0" marR="0" rtl="0" algn="l">
-              <a:lnSpc>
-                <a:spcPct val="150000"/>
-              </a:lnSpc>
-              <a:spcBef>
-                <a:spcPts val="0"/>
-              </a:spcBef>
-              <a:spcAft>
-                <a:spcPts val="0"/>
-              </a:spcAft>
-              <a:buNone/>
-            </a:pPr>
-            <a:r>
-              <a:rPr b="0" i="0" lang="en" sz="1100" u="none" cap="none" strike="noStrike">
+              </a:rPr>
+              <a:t>To confirm a dose from its reminder</a:t>
+            </a:r>
+          </a:p>
+        </p:txBody>
+      </p:sp>
+      <p:sp>
+        <p:nvSpPr>
+          <p:cNvPr id="503" name="Rounded Rectangle 502"/>
+          <p:cNvSpPr/>
+          <p:nvPr/>
+        </p:nvSpPr>
+        <p:spPr>
+          <a:xfrm>
+            <a:off x="484632" y="3429000"/>
+            <a:ext cx="3840480" cy="1024128"/>
+          </a:xfrm>
+          <a:prstGeom prst="roundRect">
+            <a:avLst/>
+          </a:prstGeom>
+          <a:solidFill>
+            <a:srgbClr val="FFFFFF"/>
+          </a:solidFill>
+          <a:ln>
+            <a:noFill/>
+          </a:ln>
+          <a:effectLst/>
+        </p:spPr>
+        <p:style>
+          <a:lnRef idx="1">
+            <a:schemeClr val="accent1"/>
+          </a:lnRef>
+          <a:fillRef idx="3">
+            <a:schemeClr val="accent1"/>
+          </a:fillRef>
+          <a:effectRef idx="2">
+            <a:schemeClr val="accent1"/>
+          </a:effectRef>
+          <a:fontRef idx="minor">
+            <a:schemeClr val="lt1"/>
+          </a:fontRef>
+        </p:style>
+        <p:txBody>
+          <a:bodyPr rtlCol="0" anchor="ctr" wrap="square"/>
+          <a:lstStyle/>
+          <a:p>
+            <a:pPr algn="ctr"/>
+            <a:r>
+              <a:rPr sz="2000" b="1">
+                <a:solidFill>
+                  <a:srgbClr val="9B1C2E"/>
+                </a:solidFill>
+                <a:latin typeface="Georgia"/>
+              </a:rPr>
+              <a:t>142 / 142</a:t>
+            </a:r>
+          </a:p>
+          <a:p>
+            <a:pPr algn="ctr"/>
+            <a:r>
+              <a:rPr sz="1100">
                 <a:solidFill>
                   <a:srgbClr val="101010"/>
                 </a:solidFill>
                 <a:latin typeface="Calibri"/>
-                <a:ea typeface="Calibri"/>
-                <a:cs typeface="Calibri"/>
-                <a:sym typeface="Calibri"/>
-              </a:rPr>
-              <a:t>   – Every primary control 64 dp or larger, against the 48 dp platform minimum</a:t>
-            </a:r>
-            <a:endParaRPr sz="1100"/>
-          </a:p>
-          <a:p>
-            <a:pPr indent="0" lvl="0" marL="0" marR="0" rtl="0" algn="l">
-              <a:lnSpc>
-                <a:spcPct val="150000"/>
-              </a:lnSpc>
-              <a:spcBef>
-                <a:spcPts val="0"/>
-              </a:spcBef>
-              <a:spcAft>
-                <a:spcPts val="0"/>
-              </a:spcAft>
-              <a:buNone/>
-            </a:pPr>
-            <a:r>
-              <a:rPr b="0" i="0" lang="en" sz="1100" u="none" cap="none" strike="noStrike">
+              </a:rPr>
+              <a:t>Automated tests passing · Lint clean</a:t>
+            </a:r>
+          </a:p>
+        </p:txBody>
+      </p:sp>
+      <p:sp>
+        <p:nvSpPr>
+          <p:cNvPr id="504" name="Rounded Rectangle 503"/>
+          <p:cNvSpPr/>
+          <p:nvPr/>
+        </p:nvSpPr>
+        <p:spPr>
+          <a:xfrm>
+            <a:off x="4800600" y="3429000"/>
+            <a:ext cx="3840480" cy="1024128"/>
+          </a:xfrm>
+          <a:prstGeom prst="roundRect">
+            <a:avLst/>
+          </a:prstGeom>
+          <a:solidFill>
+            <a:srgbClr val="FFFFFF"/>
+          </a:solidFill>
+          <a:ln>
+            <a:noFill/>
+          </a:ln>
+          <a:effectLst/>
+        </p:spPr>
+        <p:style>
+          <a:lnRef idx="1">
+            <a:schemeClr val="accent1"/>
+          </a:lnRef>
+          <a:fillRef idx="3">
+            <a:schemeClr val="accent1"/>
+          </a:fillRef>
+          <a:effectRef idx="2">
+            <a:schemeClr val="accent1"/>
+          </a:effectRef>
+          <a:fontRef idx="minor">
+            <a:schemeClr val="lt1"/>
+          </a:fontRef>
+        </p:style>
+        <p:txBody>
+          <a:bodyPr rtlCol="0" anchor="ctr" wrap="square"/>
+          <a:lstStyle/>
+          <a:p>
+            <a:pPr algn="ctr"/>
+            <a:r>
+              <a:rPr sz="2000" b="1">
+                <a:solidFill>
+                  <a:srgbClr val="9B1C2E"/>
+                </a:solidFill>
+                <a:latin typeface="Georgia"/>
+              </a:rPr>
+              <a:t>13 defects, 8 silent</a:t>
+            </a:r>
+          </a:p>
+          <a:p>
+            <a:pPr algn="ctr"/>
+            <a:r>
+              <a:rPr sz="1100">
                 <a:solidFill>
                   <a:srgbClr val="101010"/>
                 </a:solidFill>
                 <a:latin typeface="Calibri"/>
-                <a:ea typeface="Calibri"/>
-                <a:cs typeface="Calibri"/>
-                <a:sym typeface="Calibri"/>
-              </a:rPr>
-              <a:t>   – Emergency control 130 dp, roughly 2.7x the platform minimum</a:t>
-            </a:r>
-            <a:endParaRPr sz="1100"/>
-          </a:p>
-          <a:p>
-            <a:pPr indent="0" lvl="0" marL="0" marR="0" rtl="0" algn="l">
-              <a:lnSpc>
-                <a:spcPct val="150000"/>
-              </a:lnSpc>
-              <a:spcBef>
-                <a:spcPts val="0"/>
-              </a:spcBef>
-              <a:spcAft>
-                <a:spcPts val="0"/>
-              </a:spcAft>
-              <a:buNone/>
-            </a:pPr>
-            <a:r>
-              <a:rPr b="0" i="0" lang="en" sz="1100" u="none" cap="none" strike="noStrike">
-                <a:solidFill>
-                  <a:srgbClr val="101010"/>
-                </a:solidFill>
-                <a:latin typeface="Calibri"/>
-                <a:ea typeface="Calibri"/>
-                <a:cs typeface="Calibri"/>
-                <a:sym typeface="Calibri"/>
-              </a:rPr>
-              <a:t>• Interaction cost: raising an alarm takes 1 tap; confirming a dose from its</a:t>
-            </a:r>
-            <a:endParaRPr sz="1100"/>
-          </a:p>
-          <a:p>
-            <a:pPr indent="0" lvl="0" marL="0" marR="0" rtl="0" algn="l">
-              <a:lnSpc>
-                <a:spcPct val="150000"/>
-              </a:lnSpc>
-              <a:spcBef>
-                <a:spcPts val="0"/>
-              </a:spcBef>
-              <a:spcAft>
-                <a:spcPts val="0"/>
-              </a:spcAft>
-              <a:buNone/>
-            </a:pPr>
-            <a:r>
-              <a:rPr b="0" i="0" lang="en" sz="1100" u="none" cap="none" strike="noStrike">
-                <a:solidFill>
-                  <a:srgbClr val="101010"/>
-                </a:solidFill>
-                <a:latin typeface="Calibri"/>
-                <a:ea typeface="Calibri"/>
-                <a:cs typeface="Calibri"/>
-                <a:sym typeface="Calibri"/>
-              </a:rPr>
-              <a:t>   notification takes 3 taps</a:t>
-            </a:r>
-            <a:endParaRPr sz="1100"/>
-          </a:p>
-          <a:p>
-            <a:pPr indent="0" lvl="0" marL="0" marR="0" rtl="0" algn="l">
-              <a:lnSpc>
-                <a:spcPct val="150000"/>
-              </a:lnSpc>
-              <a:spcBef>
-                <a:spcPts val="0"/>
-              </a:spcBef>
-              <a:spcAft>
-                <a:spcPts val="0"/>
-              </a:spcAft>
-              <a:buNone/>
-            </a:pPr>
-            <a:r>
-              <a:rPr b="0" i="0" lang="en" sz="1100" u="none" cap="none" strike="noStrike">
-                <a:solidFill>
-                  <a:srgbClr val="101010"/>
-                </a:solidFill>
-                <a:latin typeface="Calibri"/>
-                <a:ea typeface="Calibri"/>
-                <a:cs typeface="Calibri"/>
-                <a:sym typeface="Calibri"/>
-              </a:rPr>
-              <a:t>• Structured code audit found 13 defects, of which 8 (62%) would have failed with no</a:t>
-            </a:r>
-            <a:endParaRPr sz="1100"/>
-          </a:p>
-          <a:p>
-            <a:pPr indent="0" lvl="0" marL="0" marR="0" rtl="0" algn="l">
-              <a:lnSpc>
-                <a:spcPct val="150000"/>
-              </a:lnSpc>
-              <a:spcBef>
-                <a:spcPts val="0"/>
-              </a:spcBef>
-              <a:spcAft>
-                <a:spcPts val="0"/>
-              </a:spcAft>
-              <a:buNone/>
-            </a:pPr>
-            <a:r>
-              <a:rPr b="0" i="0" lang="en" sz="1100" u="none" cap="none" strike="noStrike">
-                <a:solidFill>
-                  <a:srgbClr val="101010"/>
-                </a:solidFill>
-                <a:latin typeface="Calibri"/>
-                <a:ea typeface="Calibri"/>
-                <a:cs typeface="Calibri"/>
-                <a:sym typeface="Calibri"/>
-              </a:rPr>
-              <a:t>   message to the user at all; all were corrected and covered by regression tests</a:t>
-            </a:r>
-            <a:endParaRPr sz="1100"/>
-          </a:p>
-          <a:p>
-            <a:pPr indent="0" lvl="0" marL="0" marR="0" rtl="0" algn="l">
-              <a:lnSpc>
-                <a:spcPct val="150000"/>
-              </a:lnSpc>
-              <a:spcBef>
-                <a:spcPts val="0"/>
-              </a:spcBef>
-              <a:spcAft>
-                <a:spcPts val="0"/>
-              </a:spcAft>
-              <a:buNone/>
-            </a:pPr>
-            <a:r>
-              <a:rPr b="0" i="0" lang="en" sz="1100" u="none" cap="none" strike="noStrike">
-                <a:solidFill>
-                  <a:srgbClr val="101010"/>
-                </a:solidFill>
-                <a:latin typeface="Calibri"/>
-                <a:ea typeface="Calibri"/>
-                <a:cs typeface="Calibri"/>
-                <a:sym typeface="Calibri"/>
-              </a:rPr>
-              <a:t>• Discussion: silent failure — not usability — proved the dominant risk. The app now</a:t>
-            </a:r>
-            <a:endParaRPr sz="1100"/>
-          </a:p>
-          <a:p>
-            <a:pPr indent="0" lvl="0" marL="0" marR="0" rtl="0" algn="l">
-              <a:lnSpc>
-                <a:spcPct val="150000"/>
-              </a:lnSpc>
-              <a:spcBef>
-                <a:spcPts val="0"/>
-              </a:spcBef>
-              <a:spcAft>
-                <a:spcPts val="0"/>
-              </a:spcAft>
-              <a:buNone/>
-            </a:pPr>
-            <a:r>
-              <a:rPr b="0" i="0" lang="en" sz="1100" u="none" cap="none" strike="noStrike">
-                <a:solidFill>
-                  <a:srgbClr val="101010"/>
-                </a:solidFill>
-                <a:latin typeface="Calibri"/>
-                <a:ea typeface="Calibri"/>
-                <a:cs typeface="Calibri"/>
-                <a:sym typeface="Calibri"/>
-              </a:rPr>
-              <a:t>   never reports an outcome it has not actually observed.</a:t>
-            </a:r>
-            <a:endParaRPr sz="1100"/>
+              </a:rPr>
+              <a:t>Found by audit (62%) — all corrected</a:t>
+            </a:r>
           </a:p>
         </p:txBody>
       </p:sp>
@@ -40598,351 +41182,585 @@
       </p:sp>
       <p:sp>
         <p:nvSpPr>
-          <p:cNvPr id="499" name="Google Shape;499;p48"/>
-          <p:cNvSpPr txBox="1"/>
+          <p:cNvPr id="499" name="Rounded Rectangle 498"/>
+          <p:cNvSpPr/>
           <p:nvPr/>
         </p:nvSpPr>
         <p:spPr>
           <a:xfrm>
-            <a:off x="480073" y="891540"/>
-            <a:ext cx="8229819" cy="3771900"/>
-          </a:xfrm>
-          <a:prstGeom prst="rect">
-            <a:avLst/>
-          </a:prstGeom>
-          <a:noFill/>
+            <a:off x="484632" y="1024128"/>
+            <a:ext cx="4114800" cy="484632"/>
+          </a:xfrm>
+          <a:prstGeom prst="roundRect">
+            <a:avLst/>
+          </a:prstGeom>
+          <a:solidFill>
+            <a:srgbClr val="9B1C2E"/>
+          </a:solidFill>
           <a:ln>
             <a:noFill/>
           </a:ln>
-        </p:spPr>
-        <p:txBody>
-          <a:bodyPr anchorCtr="0" anchor="t" bIns="34275" lIns="68575" spcFirstLastPara="1" rIns="68575" wrap="square" tIns="34275">
-            <a:spAutoFit/>
-          </a:bodyPr>
+          <a:effectLst/>
+        </p:spPr>
+        <p:style>
+          <a:lnRef idx="1">
+            <a:schemeClr val="accent1"/>
+          </a:lnRef>
+          <a:fillRef idx="3">
+            <a:schemeClr val="accent1"/>
+          </a:fillRef>
+          <a:effectRef idx="2">
+            <a:schemeClr val="accent1"/>
+          </a:effectRef>
+          <a:fontRef idx="minor">
+            <a:schemeClr val="lt1"/>
+          </a:fontRef>
+        </p:style>
+        <p:txBody>
+          <a:bodyPr rtlCol="0" anchor="ctr" wrap="square" lIns="73152" rIns="73152" tIns="36576" bIns="36576"/>
           <a:lstStyle/>
           <a:p>
-            <a:pPr indent="0" lvl="0" marL="0" marR="0" rtl="0" algn="l">
-              <a:lnSpc>
-                <a:spcPct val="150000"/>
-              </a:lnSpc>
-              <a:spcBef>
-                <a:spcPts val="0"/>
-              </a:spcBef>
-              <a:spcAft>
-                <a:spcPts val="0"/>
-              </a:spcAft>
-              <a:buNone/>
-            </a:pPr>
-            <a:r>
-              <a:rPr b="0" i="0" lang="en" sz="1100" u="none" cap="none" strike="noStrike">
+            <a:pPr algn="ctr">
+              <a:spcAft>
+                <a:spcPts val="0"/>
+              </a:spcAft>
+            </a:pPr>
+            <a:r>
+              <a:rPr sz="1600" b="1">
+                <a:solidFill>
+                  <a:srgbClr val="FFFFFF"/>
+                </a:solidFill>
+                <a:latin typeface="Georgia"/>
+              </a:rPr>
+              <a:t>Reminders &amp; Adherence</a:t>
+            </a:r>
+          </a:p>
+        </p:txBody>
+      </p:sp>
+      <p:sp>
+        <p:nvSpPr>
+          <p:cNvPr id="500" name="Rounded Rectangle 499"/>
+          <p:cNvSpPr/>
+          <p:nvPr/>
+        </p:nvSpPr>
+        <p:spPr>
+          <a:xfrm>
+            <a:off x="484632" y="1508760"/>
+            <a:ext cx="4114800" cy="2240280"/>
+          </a:xfrm>
+          <a:prstGeom prst="roundRect">
+            <a:avLst/>
+          </a:prstGeom>
+          <a:solidFill>
+            <a:srgbClr val="FFFFFF"/>
+          </a:solidFill>
+          <a:ln>
+            <a:noFill/>
+          </a:ln>
+          <a:effectLst/>
+        </p:spPr>
+        <p:style>
+          <a:lnRef idx="1">
+            <a:schemeClr val="accent1"/>
+          </a:lnRef>
+          <a:fillRef idx="3">
+            <a:schemeClr val="accent1"/>
+          </a:fillRef>
+          <a:effectRef idx="2">
+            <a:schemeClr val="accent1"/>
+          </a:effectRef>
+          <a:fontRef idx="minor">
+            <a:schemeClr val="lt1"/>
+          </a:fontRef>
+        </p:style>
+        <p:txBody>
+          <a:bodyPr rtlCol="0" anchor="t" wrap="square" lIns="73152" rIns="73152" tIns="36576" bIns="36576"/>
+          <a:lstStyle/>
+          <a:p>
+            <a:pPr algn="l">
+              <a:spcAft>
+                <a:spcPts val="400"/>
+              </a:spcAft>
+            </a:pPr>
+            <a:r>
+              <a:rPr sz="1100" b="0">
                 <a:solidFill>
                   <a:srgbClr val="101010"/>
                 </a:solidFill>
                 <a:latin typeface="Calibri"/>
-                <a:ea typeface="Calibri"/>
-                <a:cs typeface="Calibri"/>
-                <a:sym typeface="Calibri"/>
-              </a:rPr>
-              <a:t>142 automated tests run on the JVM with a shadowed Android runtime (no emulator needed).</a:t>
-            </a:r>
-            <a:endParaRPr sz="1100"/>
-          </a:p>
-          <a:p>
-            <a:pPr indent="0" lvl="0" marL="0" marR="0" rtl="0" algn="l">
-              <a:lnSpc>
-                <a:spcPct val="150000"/>
-              </a:lnSpc>
-              <a:spcBef>
-                <a:spcPts val="0"/>
-              </a:spcBef>
-              <a:spcAft>
-                <a:spcPts val="0"/>
-              </a:spcAft>
-              <a:buNone/>
-            </a:pPr>
-            <a:r>
-              <a:rPr b="0" i="0" lang="en" sz="1100" u="none" cap="none" strike="noStrike">
+              </a:rPr>
+              <a:t>TC-01  Reminder fires at the scheduled time — Pass</a:t>
+            </a:r>
+          </a:p>
+          <a:p>
+            <a:pPr algn="l">
+              <a:spcAft>
+                <a:spcPts val="400"/>
+              </a:spcAft>
+            </a:pPr>
+            <a:r>
+              <a:rPr sz="1100" b="0">
                 <a:solidFill>
                   <a:srgbClr val="101010"/>
                 </a:solidFill>
                 <a:latin typeface="Calibri"/>
-                <a:ea typeface="Calibri"/>
-                <a:cs typeface="Calibri"/>
-                <a:sym typeface="Calibri"/>
-              </a:rPr>
-              <a:t>TC-01  Medicine reminder fires at the scheduled time — Pass</a:t>
-            </a:r>
-            <a:endParaRPr sz="1100"/>
-          </a:p>
-          <a:p>
-            <a:pPr indent="0" lvl="0" marL="0" marR="0" rtl="0" algn="l">
-              <a:lnSpc>
-                <a:spcPct val="150000"/>
-              </a:lnSpc>
-              <a:spcBef>
-                <a:spcPts val="0"/>
-              </a:spcBef>
-              <a:spcAft>
-                <a:spcPts val="0"/>
-              </a:spcAft>
-              <a:buNone/>
-            </a:pPr>
-            <a:r>
-              <a:rPr b="0" i="0" lang="en" sz="1100" u="none" cap="none" strike="noStrike">
+              </a:rPr>
+              <a:t>TC-02  Dose taken early cancels its alarm — Pass</a:t>
+            </a:r>
+          </a:p>
+          <a:p>
+            <a:pPr algn="l">
+              <a:spcAft>
+                <a:spcPts val="400"/>
+              </a:spcAft>
+            </a:pPr>
+            <a:r>
+              <a:rPr sz="1100" b="0">
                 <a:solidFill>
                   <a:srgbClr val="101010"/>
                 </a:solidFill>
                 <a:latin typeface="Calibri"/>
-                <a:ea typeface="Calibri"/>
-                <a:cs typeface="Calibri"/>
-                <a:sym typeface="Calibri"/>
-              </a:rPr>
-              <a:t>TC-02  A dose answered early cancels its pending alarm (no double-dose prompt) — Pass</a:t>
-            </a:r>
-            <a:endParaRPr sz="1100"/>
-          </a:p>
-          <a:p>
-            <a:pPr indent="0" lvl="0" marL="0" marR="0" rtl="0" algn="l">
-              <a:lnSpc>
-                <a:spcPct val="150000"/>
-              </a:lnSpc>
-              <a:spcBef>
-                <a:spcPts val="0"/>
-              </a:spcBef>
-              <a:spcAft>
-                <a:spcPts val="0"/>
-              </a:spcAft>
-              <a:buNone/>
-            </a:pPr>
-            <a:r>
-              <a:rPr b="0" i="0" lang="en" sz="1100" u="none" cap="none" strike="noStrike">
+              </a:rPr>
+              <a:t>TC-03  Alarms restored after restart — Pass</a:t>
+            </a:r>
+          </a:p>
+          <a:p>
+            <a:pPr algn="l">
+              <a:spcAft>
+                <a:spcPts val="400"/>
+              </a:spcAft>
+            </a:pPr>
+            <a:r>
+              <a:rPr sz="1100" b="0">
                 <a:solidFill>
                   <a:srgbClr val="101010"/>
                 </a:solidFill>
                 <a:latin typeface="Calibri"/>
-                <a:ea typeface="Calibri"/>
-                <a:cs typeface="Calibri"/>
-                <a:sym typeface="Calibri"/>
-              </a:rPr>
-              <a:t>TC-03  Armed alarms are restored after a device restart — Pass</a:t>
-            </a:r>
-            <a:endParaRPr sz="1100"/>
-          </a:p>
-          <a:p>
-            <a:pPr indent="0" lvl="0" marL="0" marR="0" rtl="0" algn="l">
-              <a:lnSpc>
-                <a:spcPct val="150000"/>
-              </a:lnSpc>
-              <a:spcBef>
-                <a:spcPts val="0"/>
-              </a:spcBef>
-              <a:spcAft>
-                <a:spcPts val="0"/>
-              </a:spcAft>
-              <a:buNone/>
-            </a:pPr>
-            <a:r>
-              <a:rPr b="0" i="0" lang="en" sz="1100" u="none" cap="none" strike="noStrike">
+              </a:rPr>
+              <a:t>TC-04  Offline dose queued, synced later — Pass</a:t>
+            </a:r>
+          </a:p>
+          <a:p>
+            <a:pPr algn="l">
+              <a:spcAft>
+                <a:spcPts val="400"/>
+              </a:spcAft>
+            </a:pPr>
+            <a:r>
+              <a:rPr sz="1100" b="0">
                 <a:solidFill>
                   <a:srgbClr val="101010"/>
                 </a:solidFill>
                 <a:latin typeface="Calibri"/>
-                <a:ea typeface="Calibri"/>
-                <a:cs typeface="Calibri"/>
-                <a:sym typeface="Calibri"/>
-              </a:rPr>
-              <a:t>TC-04  Adherence recorded while offline is queued and synced later — Pass</a:t>
-            </a:r>
-            <a:endParaRPr sz="1100"/>
-          </a:p>
-          <a:p>
-            <a:pPr indent="0" lvl="0" marL="0" marR="0" rtl="0" algn="l">
-              <a:lnSpc>
-                <a:spcPct val="150000"/>
-              </a:lnSpc>
-              <a:spcBef>
-                <a:spcPts val="0"/>
-              </a:spcBef>
-              <a:spcAft>
-                <a:spcPts val="0"/>
-              </a:spcAft>
-              <a:buNone/>
-            </a:pPr>
-            <a:r>
-              <a:rPr b="0" i="0" lang="en" sz="1100" u="none" cap="none" strike="noStrike">
+              </a:rPr>
+              <a:t>TC-09  Water / walk reminders delivered — Pass</a:t>
+            </a:r>
+          </a:p>
+        </p:txBody>
+      </p:sp>
+      <p:sp>
+        <p:nvSpPr>
+          <p:cNvPr id="501" name="Rounded Rectangle 500"/>
+          <p:cNvSpPr/>
+          <p:nvPr/>
+        </p:nvSpPr>
+        <p:spPr>
+          <a:xfrm>
+            <a:off x="4599432" y="1024128"/>
+            <a:ext cx="4114800" cy="484632"/>
+          </a:xfrm>
+          <a:prstGeom prst="roundRect">
+            <a:avLst/>
+          </a:prstGeom>
+          <a:solidFill>
+            <a:srgbClr val="9B1C2E"/>
+          </a:solidFill>
+          <a:ln>
+            <a:noFill/>
+          </a:ln>
+          <a:effectLst/>
+        </p:spPr>
+        <p:style>
+          <a:lnRef idx="1">
+            <a:schemeClr val="accent1"/>
+          </a:lnRef>
+          <a:fillRef idx="3">
+            <a:schemeClr val="accent1"/>
+          </a:fillRef>
+          <a:effectRef idx="2">
+            <a:schemeClr val="accent1"/>
+          </a:effectRef>
+          <a:fontRef idx="minor">
+            <a:schemeClr val="lt1"/>
+          </a:fontRef>
+        </p:style>
+        <p:txBody>
+          <a:bodyPr rtlCol="0" anchor="ctr" wrap="square" lIns="73152" rIns="73152" tIns="36576" bIns="36576"/>
+          <a:lstStyle/>
+          <a:p>
+            <a:pPr algn="ctr">
+              <a:spcAft>
+                <a:spcPts val="0"/>
+              </a:spcAft>
+            </a:pPr>
+            <a:r>
+              <a:rPr sz="1600" b="1">
+                <a:solidFill>
+                  <a:srgbClr val="FFFFFF"/>
+                </a:solidFill>
+                <a:latin typeface="Georgia"/>
+              </a:rPr>
+              <a:t>Emergency, Access &amp; UI</a:t>
+            </a:r>
+          </a:p>
+        </p:txBody>
+      </p:sp>
+      <p:sp>
+        <p:nvSpPr>
+          <p:cNvPr id="502" name="Rounded Rectangle 501"/>
+          <p:cNvSpPr/>
+          <p:nvPr/>
+        </p:nvSpPr>
+        <p:spPr>
+          <a:xfrm>
+            <a:off x="4599432" y="1508760"/>
+            <a:ext cx="4114800" cy="2240280"/>
+          </a:xfrm>
+          <a:prstGeom prst="roundRect">
+            <a:avLst/>
+          </a:prstGeom>
+          <a:solidFill>
+            <a:srgbClr val="FFFFFF"/>
+          </a:solidFill>
+          <a:ln>
+            <a:noFill/>
+          </a:ln>
+          <a:effectLst/>
+        </p:spPr>
+        <p:style>
+          <a:lnRef idx="1">
+            <a:schemeClr val="accent1"/>
+          </a:lnRef>
+          <a:fillRef idx="3">
+            <a:schemeClr val="accent1"/>
+          </a:fillRef>
+          <a:effectRef idx="2">
+            <a:schemeClr val="accent1"/>
+          </a:effectRef>
+          <a:fontRef idx="minor">
+            <a:schemeClr val="lt1"/>
+          </a:fontRef>
+        </p:style>
+        <p:txBody>
+          <a:bodyPr rtlCol="0" anchor="t" wrap="square" lIns="73152" rIns="73152" tIns="36576" bIns="36576"/>
+          <a:lstStyle/>
+          <a:p>
+            <a:pPr algn="l">
+              <a:spcAft>
+                <a:spcPts val="400"/>
+              </a:spcAft>
+            </a:pPr>
+            <a:r>
+              <a:rPr sz="1100" b="0">
                 <a:solidFill>
                   <a:srgbClr val="101010"/>
                 </a:solidFill>
                 <a:latin typeface="Calibri"/>
-                <a:ea typeface="Calibri"/>
-                <a:cs typeface="Calibri"/>
-                <a:sym typeface="Calibri"/>
-              </a:rPr>
-              <a:t>TC-05  SOS reaches the guardian; if it fails, the screen says so and offers a fallback — Pass</a:t>
-            </a:r>
-            <a:endParaRPr sz="1100"/>
-          </a:p>
-          <a:p>
-            <a:pPr indent="0" lvl="0" marL="0" marR="0" rtl="0" algn="l">
-              <a:lnSpc>
-                <a:spcPct val="150000"/>
-              </a:lnSpc>
-              <a:spcBef>
-                <a:spcPts val="0"/>
-              </a:spcBef>
-              <a:spcAft>
-                <a:spcPts val="0"/>
-              </a:spcAft>
-              <a:buNone/>
-            </a:pPr>
-            <a:r>
-              <a:rPr b="0" i="0" lang="en" sz="1100" u="none" cap="none" strike="noStrike">
+              </a:rPr>
+              <a:t>TC-05  SOS reaches guardian; failure stated — Pass</a:t>
+            </a:r>
+          </a:p>
+          <a:p>
+            <a:pPr algn="l">
+              <a:spcAft>
+                <a:spcPts val="400"/>
+              </a:spcAft>
+            </a:pPr>
+            <a:r>
+              <a:rPr sz="1100" b="0">
                 <a:solidFill>
                   <a:srgbClr val="101010"/>
                 </a:solidFill>
                 <a:latin typeface="Calibri"/>
-                <a:ea typeface="Calibri"/>
-                <a:cs typeface="Calibri"/>
-                <a:sym typeface="Calibri"/>
-              </a:rPr>
-              <a:t>TC-06  Invite code is single-use, expires in 7 days, cannot rebind a claimed profile — Pass</a:t>
-            </a:r>
-            <a:endParaRPr sz="1100"/>
-          </a:p>
-          <a:p>
-            <a:pPr indent="0" lvl="0" marL="0" marR="0" rtl="0" algn="l">
-              <a:lnSpc>
-                <a:spcPct val="150000"/>
-              </a:lnSpc>
-              <a:spcBef>
-                <a:spcPts val="0"/>
-              </a:spcBef>
-              <a:spcAft>
-                <a:spcPts val="0"/>
-              </a:spcAft>
-              <a:buNone/>
-            </a:pPr>
-            <a:r>
-              <a:rPr b="0" i="0" lang="en" sz="1100" u="none" cap="none" strike="noStrike">
+              </a:rPr>
+              <a:t>TC-06  Invite code single-use, 7-day expiry — Pass</a:t>
+            </a:r>
+          </a:p>
+          <a:p>
+            <a:pPr algn="l">
+              <a:spcAft>
+                <a:spcPts val="400"/>
+              </a:spcAft>
+            </a:pPr>
+            <a:r>
+              <a:rPr sz="1100" b="0">
                 <a:solidFill>
                   <a:srgbClr val="101010"/>
                 </a:solidFill>
                 <a:latin typeface="Calibri"/>
-                <a:ea typeface="Calibri"/>
-                <a:cs typeface="Calibri"/>
-                <a:sym typeface="Calibri"/>
-              </a:rPr>
-              <a:t>TC-07  Elder interface renders correctly in English, Hindi, Marathi and Gujarati — Pass</a:t>
-            </a:r>
-            <a:endParaRPr sz="1100"/>
-          </a:p>
-          <a:p>
-            <a:pPr indent="0" lvl="0" marL="0" marR="0" rtl="0" algn="l">
-              <a:lnSpc>
-                <a:spcPct val="150000"/>
-              </a:lnSpc>
-              <a:spcBef>
-                <a:spcPts val="0"/>
-              </a:spcBef>
-              <a:spcAft>
-                <a:spcPts val="0"/>
-              </a:spcAft>
-              <a:buNone/>
-            </a:pPr>
-            <a:r>
-              <a:rPr b="0" i="0" lang="en" sz="1100" u="none" cap="none" strike="noStrike">
+              </a:rPr>
+              <a:t>TC-07  Elder UI correct in all four languages — Pass</a:t>
+            </a:r>
+          </a:p>
+          <a:p>
+            <a:pPr algn="l">
+              <a:spcAft>
+                <a:spcPts val="400"/>
+              </a:spcAft>
+            </a:pPr>
+            <a:r>
+              <a:rPr sz="1100" b="0">
                 <a:solidFill>
                   <a:srgbClr val="101010"/>
                 </a:solidFill>
                 <a:latin typeface="Calibri"/>
-                <a:ea typeface="Calibri"/>
-                <a:cs typeface="Calibri"/>
-                <a:sym typeface="Calibri"/>
-              </a:rPr>
-              <a:t>TC-08  Guardian save operations show a readable error when the network fails — Pass</a:t>
-            </a:r>
-            <a:endParaRPr sz="1100"/>
-          </a:p>
-          <a:p>
-            <a:pPr indent="0" lvl="0" marL="0" marR="0" rtl="0" algn="l">
-              <a:lnSpc>
-                <a:spcPct val="150000"/>
-              </a:lnSpc>
-              <a:spcBef>
-                <a:spcPts val="0"/>
-              </a:spcBef>
-              <a:spcAft>
-                <a:spcPts val="0"/>
-              </a:spcAft>
-              <a:buNone/>
-            </a:pPr>
-            <a:r>
-              <a:rPr b="0" i="0" lang="en" sz="1100" u="none" cap="none" strike="noStrike">
+              </a:rPr>
+              <a:t>TC-08  Save errors shown on network failure — Pass</a:t>
+            </a:r>
+          </a:p>
+          <a:p>
+            <a:pPr algn="l">
+              <a:spcAft>
+                <a:spcPts val="400"/>
+              </a:spcAft>
+            </a:pPr>
+            <a:r>
+              <a:rPr sz="1100" b="0">
                 <a:solidFill>
                   <a:srgbClr val="101010"/>
                 </a:solidFill>
                 <a:latin typeface="Calibri"/>
-                <a:ea typeface="Calibri"/>
-                <a:cs typeface="Calibri"/>
-                <a:sym typeface="Calibri"/>
-              </a:rPr>
-              <a:t>TC-09  General reminders (water, walk) are armed on the elder's device — Pass</a:t>
-            </a:r>
-            <a:endParaRPr sz="1100"/>
-          </a:p>
-          <a:p>
-            <a:pPr indent="0" lvl="0" marL="0" marR="0" rtl="0" algn="l">
-              <a:lnSpc>
-                <a:spcPct val="150000"/>
-              </a:lnSpc>
-              <a:spcBef>
-                <a:spcPts val="0"/>
-              </a:spcBef>
-              <a:spcAft>
-                <a:spcPts val="0"/>
-              </a:spcAft>
-              <a:buNone/>
-            </a:pPr>
-            <a:r>
-              <a:rPr b="0" i="0" lang="en" sz="1100" u="none" cap="none" strike="noStrike">
-                <a:solidFill>
-                  <a:srgbClr val="101010"/>
+              </a:rPr>
+              <a:t>TC-10  SOS not silenced by notification toggle — Pass</a:t>
+            </a:r>
+          </a:p>
+        </p:txBody>
+      </p:sp>
+      <p:sp>
+        <p:nvSpPr>
+          <p:cNvPr id="503" name="Rounded Rectangle 502"/>
+          <p:cNvSpPr/>
+          <p:nvPr/>
+        </p:nvSpPr>
+        <p:spPr>
+          <a:xfrm>
+            <a:off x="233171" y="3913632"/>
+            <a:ext cx="2011680" cy="402336"/>
+          </a:xfrm>
+          <a:prstGeom prst="roundRect">
+            <a:avLst/>
+          </a:prstGeom>
+          <a:solidFill>
+            <a:srgbClr val="9B1C2E"/>
+          </a:solidFill>
+          <a:ln>
+            <a:noFill/>
+          </a:ln>
+          <a:effectLst/>
+        </p:spPr>
+        <p:style>
+          <a:lnRef idx="1">
+            <a:schemeClr val="accent1"/>
+          </a:lnRef>
+          <a:fillRef idx="3">
+            <a:schemeClr val="accent1"/>
+          </a:fillRef>
+          <a:effectRef idx="2">
+            <a:schemeClr val="accent1"/>
+          </a:effectRef>
+          <a:fontRef idx="minor">
+            <a:schemeClr val="lt1"/>
+          </a:fontRef>
+        </p:style>
+        <p:txBody>
+          <a:bodyPr rtlCol="0" anchor="ctr" wrap="square" lIns="73152" rIns="73152" tIns="36576" bIns="36576"/>
+          <a:lstStyle/>
+          <a:p>
+            <a:pPr algn="ctr">
+              <a:spcAft>
+                <a:spcPts val="0"/>
+              </a:spcAft>
+            </a:pPr>
+            <a:r>
+              <a:rPr sz="1000" b="1">
+                <a:solidFill>
+                  <a:srgbClr val="FFFFFF"/>
                 </a:solidFill>
                 <a:latin typeface="Calibri"/>
-                <a:ea typeface="Calibri"/>
-                <a:cs typeface="Calibri"/>
-                <a:sym typeface="Calibri"/>
-              </a:rPr>
-              <a:t>TC-10  Emergency alerts are not silenced by the general notification setting — Pass</a:t>
-            </a:r>
-            <a:endParaRPr sz="1100"/>
-          </a:p>
-          <a:p>
-            <a:pPr indent="0" lvl="0" marL="0" marR="0" rtl="0" algn="l">
-              <a:lnSpc>
-                <a:spcPct val="150000"/>
-              </a:lnSpc>
-              <a:spcBef>
-                <a:spcPts val="0"/>
-              </a:spcBef>
-              <a:spcAft>
-                <a:spcPts val="0"/>
-              </a:spcAft>
-              <a:buNone/>
-            </a:pPr>
-            <a:r>
-              <a:rPr b="0" i="0" lang="en" sz="1100" u="none" cap="none" strike="noStrike">
-                <a:solidFill>
-                  <a:srgbClr val="101010"/>
+              </a:rPr>
+              <a:t>142 automated tests</a:t>
+            </a:r>
+          </a:p>
+        </p:txBody>
+      </p:sp>
+      <p:sp>
+        <p:nvSpPr>
+          <p:cNvPr id="504" name="Rounded Rectangle 503"/>
+          <p:cNvSpPr/>
+          <p:nvPr/>
+        </p:nvSpPr>
+        <p:spPr>
+          <a:xfrm>
+            <a:off x="2455164" y="3913632"/>
+            <a:ext cx="2011680" cy="402336"/>
+          </a:xfrm>
+          <a:prstGeom prst="roundRect">
+            <a:avLst/>
+          </a:prstGeom>
+          <a:solidFill>
+            <a:srgbClr val="6E101F"/>
+          </a:solidFill>
+          <a:ln>
+            <a:noFill/>
+          </a:ln>
+          <a:effectLst/>
+        </p:spPr>
+        <p:style>
+          <a:lnRef idx="1">
+            <a:schemeClr val="accent1"/>
+          </a:lnRef>
+          <a:fillRef idx="3">
+            <a:schemeClr val="accent1"/>
+          </a:fillRef>
+          <a:effectRef idx="2">
+            <a:schemeClr val="accent1"/>
+          </a:effectRef>
+          <a:fontRef idx="minor">
+            <a:schemeClr val="lt1"/>
+          </a:fontRef>
+        </p:style>
+        <p:txBody>
+          <a:bodyPr rtlCol="0" anchor="ctr" wrap="square" lIns="73152" rIns="73152" tIns="36576" bIns="36576"/>
+          <a:lstStyle/>
+          <a:p>
+            <a:pPr algn="ctr">
+              <a:spcAft>
+                <a:spcPts val="0"/>
+              </a:spcAft>
+            </a:pPr>
+            <a:r>
+              <a:rPr sz="1000" b="1">
+                <a:solidFill>
+                  <a:srgbClr val="FFFFFF"/>
                 </a:solidFill>
                 <a:latin typeface="Calibri"/>
-                <a:ea typeface="Calibri"/>
-                <a:cs typeface="Calibri"/>
-                <a:sym typeface="Calibri"/>
-              </a:rPr>
-              <a:t>Android Lint: 0 errors at release configuration.</a:t>
-            </a:r>
-            <a:endParaRPr sz="1100"/>
+              </a:rPr>
+              <a:t>JVM + Robolectric</a:t>
+            </a:r>
+          </a:p>
+        </p:txBody>
+      </p:sp>
+      <p:sp>
+        <p:nvSpPr>
+          <p:cNvPr id="505" name="Rounded Rectangle 504"/>
+          <p:cNvSpPr/>
+          <p:nvPr/>
+        </p:nvSpPr>
+        <p:spPr>
+          <a:xfrm>
+            <a:off x="4677156" y="3913632"/>
+            <a:ext cx="2011680" cy="402336"/>
+          </a:xfrm>
+          <a:prstGeom prst="roundRect">
+            <a:avLst/>
+          </a:prstGeom>
+          <a:solidFill>
+            <a:srgbClr val="9B1C2E"/>
+          </a:solidFill>
+          <a:ln>
+            <a:noFill/>
+          </a:ln>
+          <a:effectLst/>
+        </p:spPr>
+        <p:style>
+          <a:lnRef idx="1">
+            <a:schemeClr val="accent1"/>
+          </a:lnRef>
+          <a:fillRef idx="3">
+            <a:schemeClr val="accent1"/>
+          </a:fillRef>
+          <a:effectRef idx="2">
+            <a:schemeClr val="accent1"/>
+          </a:effectRef>
+          <a:fontRef idx="minor">
+            <a:schemeClr val="lt1"/>
+          </a:fontRef>
+        </p:style>
+        <p:txBody>
+          <a:bodyPr rtlCol="0" anchor="ctr" wrap="square" lIns="73152" rIns="73152" tIns="36576" bIns="36576"/>
+          <a:lstStyle/>
+          <a:p>
+            <a:pPr algn="ctr">
+              <a:spcAft>
+                <a:spcPts val="0"/>
+              </a:spcAft>
+            </a:pPr>
+            <a:r>
+              <a:rPr sz="1000" b="1">
+                <a:solidFill>
+                  <a:srgbClr val="FFFFFF"/>
+                </a:solidFill>
+                <a:latin typeface="Calibri"/>
+              </a:rPr>
+              <a:t>No emulator required</a:t>
+            </a:r>
+          </a:p>
+        </p:txBody>
+      </p:sp>
+      <p:sp>
+        <p:nvSpPr>
+          <p:cNvPr id="506" name="Rounded Rectangle 505"/>
+          <p:cNvSpPr/>
+          <p:nvPr/>
+        </p:nvSpPr>
+        <p:spPr>
+          <a:xfrm>
+            <a:off x="6899148" y="3913632"/>
+            <a:ext cx="2011680" cy="402336"/>
+          </a:xfrm>
+          <a:prstGeom prst="roundRect">
+            <a:avLst/>
+          </a:prstGeom>
+          <a:solidFill>
+            <a:srgbClr val="6E101F"/>
+          </a:solidFill>
+          <a:ln>
+            <a:noFill/>
+          </a:ln>
+          <a:effectLst/>
+        </p:spPr>
+        <p:style>
+          <a:lnRef idx="1">
+            <a:schemeClr val="accent1"/>
+          </a:lnRef>
+          <a:fillRef idx="3">
+            <a:schemeClr val="accent1"/>
+          </a:fillRef>
+          <a:effectRef idx="2">
+            <a:schemeClr val="accent1"/>
+          </a:effectRef>
+          <a:fontRef idx="minor">
+            <a:schemeClr val="lt1"/>
+          </a:fontRef>
+        </p:style>
+        <p:txBody>
+          <a:bodyPr rtlCol="0" anchor="ctr" wrap="square" lIns="73152" rIns="73152" tIns="36576" bIns="36576"/>
+          <a:lstStyle/>
+          <a:p>
+            <a:pPr algn="ctr">
+              <a:spcAft>
+                <a:spcPts val="0"/>
+              </a:spcAft>
+            </a:pPr>
+            <a:r>
+              <a:rPr sz="1000" b="1">
+                <a:solidFill>
+                  <a:srgbClr val="FFFFFF"/>
+                </a:solidFill>
+                <a:latin typeface="Calibri"/>
+              </a:rPr>
+              <a:t>Lint: 0 errors</a:t>
+            </a:r>
           </a:p>
         </p:txBody>
       </p:sp>
@@ -41340,297 +42158,405 @@
       </p:sp>
       <p:sp>
         <p:nvSpPr>
-          <p:cNvPr id="499" name="Google Shape;499;p48"/>
-          <p:cNvSpPr txBox="1"/>
+          <p:cNvPr id="499" name="Rounded Rectangle 498"/>
+          <p:cNvSpPr/>
           <p:nvPr/>
         </p:nvSpPr>
         <p:spPr>
           <a:xfrm>
-            <a:off x="480073" y="891540"/>
-            <a:ext cx="8229819" cy="3771900"/>
-          </a:xfrm>
-          <a:prstGeom prst="rect">
-            <a:avLst/>
-          </a:prstGeom>
-          <a:noFill/>
+            <a:off x="484632" y="1024128"/>
+            <a:ext cx="4114800" cy="484632"/>
+          </a:xfrm>
+          <a:prstGeom prst="roundRect">
+            <a:avLst/>
+          </a:prstGeom>
+          <a:solidFill>
+            <a:srgbClr val="9B1C2E"/>
+          </a:solidFill>
           <a:ln>
             <a:noFill/>
           </a:ln>
-        </p:spPr>
-        <p:txBody>
-          <a:bodyPr anchorCtr="0" anchor="t" bIns="34275" lIns="68575" spcFirstLastPara="1" rIns="68575" wrap="square" tIns="34275">
-            <a:spAutoFit/>
-          </a:bodyPr>
+          <a:effectLst/>
+        </p:spPr>
+        <p:style>
+          <a:lnRef idx="1">
+            <a:schemeClr val="accent1"/>
+          </a:lnRef>
+          <a:fillRef idx="3">
+            <a:schemeClr val="accent1"/>
+          </a:fillRef>
+          <a:effectRef idx="2">
+            <a:schemeClr val="accent1"/>
+          </a:effectRef>
+          <a:fontRef idx="minor">
+            <a:schemeClr val="lt1"/>
+          </a:fontRef>
+        </p:style>
+        <p:txBody>
+          <a:bodyPr rtlCol="0" anchor="ctr" wrap="square" lIns="73152" rIns="73152" tIns="36576" bIns="36576"/>
           <a:lstStyle/>
           <a:p>
-            <a:pPr indent="0" lvl="0" marL="0" marR="0" rtl="0" algn="l">
-              <a:lnSpc>
-                <a:spcPct val="150000"/>
-              </a:lnSpc>
-              <a:spcBef>
-                <a:spcPts val="0"/>
-              </a:spcBef>
-              <a:spcAft>
-                <a:spcPts val="0"/>
-              </a:spcAft>
-              <a:buNone/>
-            </a:pPr>
-            <a:r>
-              <a:rPr b="0" i="0" lang="en" sz="1200" u="none" cap="none" strike="noStrike">
+            <a:pPr algn="ctr">
+              <a:spcAft>
+                <a:spcPts val="0"/>
+              </a:spcAft>
+            </a:pPr>
+            <a:r>
+              <a:rPr sz="1600" b="1">
+                <a:solidFill>
+                  <a:srgbClr val="FFFFFF"/>
+                </a:solidFill>
+                <a:latin typeface="Georgia"/>
+              </a:rPr>
+              <a:t>The Paper</a:t>
+            </a:r>
+          </a:p>
+        </p:txBody>
+      </p:sp>
+      <p:sp>
+        <p:nvSpPr>
+          <p:cNvPr id="500" name="Rounded Rectangle 499"/>
+          <p:cNvSpPr/>
+          <p:nvPr/>
+        </p:nvSpPr>
+        <p:spPr>
+          <a:xfrm>
+            <a:off x="484632" y="1508760"/>
+            <a:ext cx="4114800" cy="2880360"/>
+          </a:xfrm>
+          <a:prstGeom prst="roundRect">
+            <a:avLst/>
+          </a:prstGeom>
+          <a:solidFill>
+            <a:srgbClr val="FFFFFF"/>
+          </a:solidFill>
+          <a:ln>
+            <a:noFill/>
+          </a:ln>
+          <a:effectLst/>
+        </p:spPr>
+        <p:style>
+          <a:lnRef idx="1">
+            <a:schemeClr val="accent1"/>
+          </a:lnRef>
+          <a:fillRef idx="3">
+            <a:schemeClr val="accent1"/>
+          </a:fillRef>
+          <a:effectRef idx="2">
+            <a:schemeClr val="accent1"/>
+          </a:effectRef>
+          <a:fontRef idx="minor">
+            <a:schemeClr val="lt1"/>
+          </a:fontRef>
+        </p:style>
+        <p:txBody>
+          <a:bodyPr rtlCol="0" anchor="t" wrap="square" lIns="73152" rIns="73152" tIns="36576" bIns="36576"/>
+          <a:lstStyle/>
+          <a:p>
+            <a:pPr algn="l">
+              <a:spcAft>
+                <a:spcPts val="400"/>
+              </a:spcAft>
+            </a:pPr>
+            <a:r>
+              <a:rPr sz="1100" b="0">
                 <a:solidFill>
                   <a:srgbClr val="101010"/>
                 </a:solidFill>
                 <a:latin typeface="Calibri"/>
-                <a:ea typeface="Calibri"/>
-                <a:cs typeface="Calibri"/>
-                <a:sym typeface="Calibri"/>
-              </a:rPr>
-              <a:t>Title: CareCompanion: Assistive Companion Mobile Application for Elderly and Disabled Users</a:t>
-            </a:r>
-            <a:endParaRPr sz="1100"/>
-          </a:p>
-          <a:p>
-            <a:pPr indent="0" lvl="0" marL="0" marR="0" rtl="0" algn="l">
-              <a:lnSpc>
-                <a:spcPct val="150000"/>
-              </a:lnSpc>
-              <a:spcBef>
-                <a:spcPts val="0"/>
-              </a:spcBef>
-              <a:spcAft>
-                <a:spcPts val="0"/>
-              </a:spcAft>
-              <a:buNone/>
-            </a:pPr>
-            <a:r>
-              <a:rPr b="0" i="0" lang="en" sz="1200" u="none" cap="none" strike="noStrike">
+              </a:rPr>
+              <a:t>Title: CareCompanion: Assistive Companion Mobile</a:t>
+            </a:r>
+          </a:p>
+          <a:p>
+            <a:pPr algn="l">
+              <a:spcAft>
+                <a:spcPts val="400"/>
+              </a:spcAft>
+            </a:pPr>
+            <a:r>
+              <a:rPr sz="1100" b="0">
                 <a:solidFill>
                   <a:srgbClr val="101010"/>
                 </a:solidFill>
                 <a:latin typeface="Calibri"/>
-                <a:ea typeface="Calibri"/>
-                <a:cs typeface="Calibri"/>
-                <a:sym typeface="Calibri"/>
+              </a:rPr>
+              <a:t>Application for Elderly and Disabled Users</a:t>
+            </a:r>
+          </a:p>
+          <a:p>
+            <a:pPr algn="l">
+              <a:spcAft>
+                <a:spcPts val="400"/>
+              </a:spcAft>
+            </a:pPr>
+            <a:r>
+              <a:rPr sz="1100" b="0">
+                <a:solidFill>
+                  <a:srgbClr val="101010"/>
+                </a:solidFill>
+                <a:latin typeface="Calibri"/>
               </a:rPr>
               <a:t/>
             </a:r>
-            <a:endParaRPr sz="1100"/>
-          </a:p>
-          <a:p>
-            <a:pPr indent="0" lvl="0" marL="0" marR="0" rtl="0" algn="l">
-              <a:lnSpc>
-                <a:spcPct val="150000"/>
-              </a:lnSpc>
-              <a:spcBef>
-                <a:spcPts val="0"/>
-              </a:spcBef>
-              <a:spcAft>
-                <a:spcPts val="0"/>
-              </a:spcAft>
-              <a:buNone/>
-            </a:pPr>
-            <a:r>
-              <a:rPr b="0" i="0" lang="en" sz="1200" u="none" cap="none" strike="noStrike">
+          </a:p>
+          <a:p>
+            <a:pPr algn="l">
+              <a:spcAft>
+                <a:spcPts val="400"/>
+              </a:spcAft>
+            </a:pPr>
+            <a:r>
+              <a:rPr sz="1100" b="0">
                 <a:solidFill>
                   <a:srgbClr val="101010"/>
                 </a:solidFill>
                 <a:latin typeface="Calibri"/>
-                <a:ea typeface="Calibri"/>
-                <a:cs typeface="Calibri"/>
-                <a:sym typeface="Calibri"/>
-              </a:rPr>
-              <a:t>• Format: IEEE two-column, 7 pages, 6 figures, 1 table, 21 references</a:t>
-            </a:r>
-            <a:endParaRPr sz="1100"/>
-          </a:p>
-          <a:p>
-            <a:pPr indent="0" lvl="0" marL="0" marR="0" rtl="0" algn="l">
-              <a:lnSpc>
-                <a:spcPct val="150000"/>
-              </a:lnSpc>
-              <a:spcBef>
-                <a:spcPts val="0"/>
-              </a:spcBef>
-              <a:spcAft>
-                <a:spcPts val="0"/>
-              </a:spcAft>
-              <a:buNone/>
-            </a:pPr>
-            <a:r>
-              <a:rPr b="0" i="0" lang="en" sz="1200" u="none" cap="none" strike="noStrike">
+              </a:rPr>
+              <a:t>• IEEE format · 7 pages · 6 figures · 21 references</a:t>
+            </a:r>
+          </a:p>
+          <a:p>
+            <a:pPr algn="l">
+              <a:spcAft>
+                <a:spcPts val="400"/>
+              </a:spcAft>
+            </a:pPr>
+            <a:r>
+              <a:rPr sz="1100" b="0">
                 <a:solidFill>
                   <a:srgbClr val="101010"/>
                 </a:solidFill>
                 <a:latin typeface="Calibri"/>
-                <a:ea typeface="Calibri"/>
-                <a:cs typeface="Calibri"/>
-                <a:sym typeface="Calibri"/>
-              </a:rPr>
-              <a:t>• Contributions: asymmetric dual-surface design; out-of-band device binding;</a:t>
-            </a:r>
-            <a:endParaRPr sz="1100"/>
-          </a:p>
-          <a:p>
-            <a:pPr indent="0" lvl="0" marL="0" marR="0" rtl="0" algn="l">
-              <a:lnSpc>
-                <a:spcPct val="150000"/>
-              </a:lnSpc>
-              <a:spcBef>
-                <a:spcPts val="0"/>
-              </a:spcBef>
-              <a:spcAft>
-                <a:spcPts val="0"/>
-              </a:spcAft>
-              <a:buNone/>
-            </a:pPr>
-            <a:r>
-              <a:rPr b="0" i="0" lang="en" sz="1200" u="none" cap="none" strike="noStrike">
+              </a:rPr>
+              <a:t>• Contributions: dual-surface design, secure device</a:t>
+            </a:r>
+          </a:p>
+          <a:p>
+            <a:pPr algn="l">
+              <a:spcAft>
+                <a:spcPts val="400"/>
+              </a:spcAft>
+            </a:pPr>
+            <a:r>
+              <a:rPr sz="1100" b="0">
                 <a:solidFill>
                   <a:srgbClr val="101010"/>
                 </a:solidFill>
                 <a:latin typeface="Calibri"/>
-                <a:ea typeface="Calibri"/>
-                <a:cs typeface="Calibri"/>
-                <a:sym typeface="Calibri"/>
-              </a:rPr>
-              <a:t>   fail-honest emergency alerting; an empirical defect taxonomy</a:t>
-            </a:r>
-            <a:endParaRPr sz="1100"/>
-          </a:p>
-          <a:p>
-            <a:pPr indent="0" lvl="0" marL="0" marR="0" rtl="0" algn="l">
-              <a:lnSpc>
-                <a:spcPct val="150000"/>
-              </a:lnSpc>
-              <a:spcBef>
-                <a:spcPts val="0"/>
-              </a:spcBef>
-              <a:spcAft>
-                <a:spcPts val="0"/>
-              </a:spcAft>
-              <a:buNone/>
-            </a:pPr>
-            <a:r>
-              <a:rPr b="0" i="0" lang="en" sz="1200" u="none" cap="none" strike="noStrike">
+              </a:rPr>
+              <a:t>   binding, fail-honest alerting, defect taxonomy</a:t>
+            </a:r>
+          </a:p>
+          <a:p>
+            <a:pPr algn="l">
+              <a:spcAft>
+                <a:spcPts val="400"/>
+              </a:spcAft>
+            </a:pPr>
+            <a:r>
+              <a:rPr sz="1100" b="0">
                 <a:solidFill>
                   <a:srgbClr val="101010"/>
                 </a:solidFill>
                 <a:latin typeface="Calibri"/>
-                <a:ea typeface="Calibri"/>
-                <a:cs typeface="Calibri"/>
-                <a:sym typeface="Calibri"/>
-              </a:rPr>
-              <a:t>• Figures 3, 4 and 6 are generated directly from the application source, so the</a:t>
-            </a:r>
-            <a:endParaRPr sz="1100"/>
-          </a:p>
-          <a:p>
-            <a:pPr indent="0" lvl="0" marL="0" marR="0" rtl="0" algn="l">
-              <a:lnSpc>
-                <a:spcPct val="150000"/>
-              </a:lnSpc>
-              <a:spcBef>
-                <a:spcPts val="0"/>
-              </a:spcBef>
-              <a:spcAft>
-                <a:spcPts val="0"/>
-              </a:spcAft>
-              <a:buNone/>
-            </a:pPr>
-            <a:r>
-              <a:rPr b="0" i="0" lang="en" sz="1200" u="none" cap="none" strike="noStrike">
+              </a:rPr>
+              <a:t>• Figures generated from the application source</a:t>
+            </a:r>
+          </a:p>
+        </p:txBody>
+      </p:sp>
+      <p:sp>
+        <p:nvSpPr>
+          <p:cNvPr id="501" name="Rounded Rectangle 500"/>
+          <p:cNvSpPr/>
+          <p:nvPr/>
+        </p:nvSpPr>
+        <p:spPr>
+          <a:xfrm>
+            <a:off x="4599432" y="1024128"/>
+            <a:ext cx="4114800" cy="484632"/>
+          </a:xfrm>
+          <a:prstGeom prst="roundRect">
+            <a:avLst/>
+          </a:prstGeom>
+          <a:solidFill>
+            <a:srgbClr val="9B1C2E"/>
+          </a:solidFill>
+          <a:ln>
+            <a:noFill/>
+          </a:ln>
+          <a:effectLst/>
+        </p:spPr>
+        <p:style>
+          <a:lnRef idx="1">
+            <a:schemeClr val="accent1"/>
+          </a:lnRef>
+          <a:fillRef idx="3">
+            <a:schemeClr val="accent1"/>
+          </a:fillRef>
+          <a:effectRef idx="2">
+            <a:schemeClr val="accent1"/>
+          </a:effectRef>
+          <a:fontRef idx="minor">
+            <a:schemeClr val="lt1"/>
+          </a:fontRef>
+        </p:style>
+        <p:txBody>
+          <a:bodyPr rtlCol="0" anchor="ctr" wrap="square" lIns="73152" rIns="73152" tIns="36576" bIns="36576"/>
+          <a:lstStyle/>
+          <a:p>
+            <a:pPr algn="ctr">
+              <a:spcAft>
+                <a:spcPts val="0"/>
+              </a:spcAft>
+            </a:pPr>
+            <a:r>
+              <a:rPr sz="1600" b="1">
+                <a:solidFill>
+                  <a:srgbClr val="FFFFFF"/>
+                </a:solidFill>
+                <a:latin typeface="Georgia"/>
+              </a:rPr>
+              <a:t>Submission</a:t>
+            </a:r>
+          </a:p>
+        </p:txBody>
+      </p:sp>
+      <p:sp>
+        <p:nvSpPr>
+          <p:cNvPr id="502" name="Rounded Rectangle 501"/>
+          <p:cNvSpPr/>
+          <p:nvPr/>
+        </p:nvSpPr>
+        <p:spPr>
+          <a:xfrm>
+            <a:off x="4599432" y="1508760"/>
+            <a:ext cx="4114800" cy="2880360"/>
+          </a:xfrm>
+          <a:prstGeom prst="roundRect">
+            <a:avLst/>
+          </a:prstGeom>
+          <a:solidFill>
+            <a:srgbClr val="FFFFFF"/>
+          </a:solidFill>
+          <a:ln>
+            <a:noFill/>
+          </a:ln>
+          <a:effectLst/>
+        </p:spPr>
+        <p:style>
+          <a:lnRef idx="1">
+            <a:schemeClr val="accent1"/>
+          </a:lnRef>
+          <a:fillRef idx="3">
+            <a:schemeClr val="accent1"/>
+          </a:fillRef>
+          <a:effectRef idx="2">
+            <a:schemeClr val="accent1"/>
+          </a:effectRef>
+          <a:fontRef idx="minor">
+            <a:schemeClr val="lt1"/>
+          </a:fontRef>
+        </p:style>
+        <p:txBody>
+          <a:bodyPr rtlCol="0" anchor="t" wrap="square" lIns="73152" rIns="73152" tIns="36576" bIns="36576"/>
+          <a:lstStyle/>
+          <a:p>
+            <a:pPr algn="l">
+              <a:spcAft>
+                <a:spcPts val="400"/>
+              </a:spcAft>
+            </a:pPr>
+            <a:r>
+              <a:rPr sz="1100" b="0">
                 <a:solidFill>
                   <a:srgbClr val="101010"/>
                 </a:solidFill>
                 <a:latin typeface="Calibri"/>
-                <a:ea typeface="Calibri"/>
-                <a:cs typeface="Calibri"/>
-                <a:sym typeface="Calibri"/>
-              </a:rPr>
-              <a:t>   reported measurements cannot drift from the implementation</a:t>
-            </a:r>
-            <a:endParaRPr sz="1100"/>
-          </a:p>
-          <a:p>
-            <a:pPr indent="0" lvl="0" marL="0" marR="0" rtl="0" algn="l">
-              <a:lnSpc>
-                <a:spcPct val="150000"/>
-              </a:lnSpc>
-              <a:spcBef>
-                <a:spcPts val="0"/>
-              </a:spcBef>
-              <a:spcAft>
-                <a:spcPts val="0"/>
-              </a:spcAft>
-              <a:buNone/>
-            </a:pPr>
-            <a:r>
-              <a:rPr b="0" i="0" lang="en" sz="1200" u="none" cap="none" strike="noStrike">
+              </a:rPr>
+              <a:t>Submitted to ICISS 2027</a:t>
+            </a:r>
+          </a:p>
+          <a:p>
+            <a:pPr algn="l">
+              <a:spcAft>
+                <a:spcPts val="400"/>
+              </a:spcAft>
+            </a:pPr>
+            <a:r>
+              <a:rPr sz="1100" b="0">
                 <a:solidFill>
                   <a:srgbClr val="101010"/>
                 </a:solidFill>
                 <a:latin typeface="Calibri"/>
-                <a:ea typeface="Calibri"/>
-                <a:cs typeface="Calibri"/>
-                <a:sym typeface="Calibri"/>
-              </a:rPr>
-              <a:t>• All references verified against Crossref for authors, venue and identifiers</a:t>
-            </a:r>
-            <a:endParaRPr sz="1100"/>
-          </a:p>
-          <a:p>
-            <a:pPr indent="0" lvl="0" marL="0" marR="0" rtl="0" algn="l">
-              <a:lnSpc>
-                <a:spcPct val="150000"/>
-              </a:lnSpc>
-              <a:spcBef>
-                <a:spcPts val="0"/>
-              </a:spcBef>
-              <a:spcAft>
-                <a:spcPts val="0"/>
-              </a:spcAft>
-              <a:buNone/>
-            </a:pPr>
-            <a:r>
-              <a:rPr b="0" i="0" lang="en" sz="1200" u="none" cap="none" strike="noStrike">
+              </a:rPr>
+              <a:t>www.iciss2027.in</a:t>
+            </a:r>
+          </a:p>
+          <a:p>
+            <a:pPr algn="l">
+              <a:spcAft>
+                <a:spcPts val="400"/>
+              </a:spcAft>
+            </a:pPr>
+            <a:r>
+              <a:rPr sz="1100" b="0">
                 <a:solidFill>
                   <a:srgbClr val="101010"/>
                 </a:solidFill>
                 <a:latin typeface="Calibri"/>
-                <a:ea typeface="Calibri"/>
-                <a:cs typeface="Calibri"/>
-                <a:sym typeface="Calibri"/>
-              </a:rPr>
-              <a:t>• Status: draft complete and internally reviewed — not yet submitted</a:t>
-            </a:r>
-            <a:endParaRPr sz="1100"/>
-          </a:p>
-          <a:p>
-            <a:pPr indent="0" lvl="0" marL="0" marR="0" rtl="0" algn="l">
-              <a:lnSpc>
-                <a:spcPct val="150000"/>
-              </a:lnSpc>
-              <a:spcBef>
-                <a:spcPts val="0"/>
-              </a:spcBef>
-              <a:spcAft>
-                <a:spcPts val="0"/>
-              </a:spcAft>
-              <a:buNone/>
-            </a:pPr>
-            <a:r>
-              <a:rPr b="0" i="0" lang="en" sz="1200" u="none" cap="none" strike="noStrike">
+              </a:rPr>
+              <a:t/>
+            </a:r>
+          </a:p>
+          <a:p>
+            <a:pPr algn="l">
+              <a:spcAft>
+                <a:spcPts val="400"/>
+              </a:spcAft>
+            </a:pPr>
+            <a:r>
+              <a:rPr sz="1100" b="0">
                 <a:solidFill>
                   <a:srgbClr val="101010"/>
                 </a:solidFill>
                 <a:latin typeface="Calibri"/>
-                <a:ea typeface="Calibri"/>
-                <a:cs typeface="Calibri"/>
-                <a:sym typeface="Calibri"/>
-              </a:rPr>
-              <a:t>• Pending: target venue selection and a user study to support the evaluation section</a:t>
-            </a:r>
-            <a:endParaRPr sz="1100"/>
+              </a:rPr>
+              <a:t>• Peer review managed through Microsoft CMT</a:t>
+            </a:r>
+          </a:p>
+          <a:p>
+            <a:pPr algn="l">
+              <a:spcAft>
+                <a:spcPts val="400"/>
+              </a:spcAft>
+            </a:pPr>
+            <a:r>
+              <a:rPr sz="1100" b="0">
+                <a:solidFill>
+                  <a:srgbClr val="101010"/>
+                </a:solidFill>
+                <a:latin typeface="Calibri"/>
+              </a:rPr>
+              <a:t>• Status: under review</a:t>
+            </a:r>
+          </a:p>
+          <a:p>
+            <a:pPr algn="l">
+              <a:spcAft>
+                <a:spcPts val="400"/>
+              </a:spcAft>
+            </a:pPr>
+            <a:r>
+              <a:rPr sz="1100" b="0">
+                <a:solidFill>
+                  <a:srgbClr val="101010"/>
+                </a:solidFill>
+                <a:latin typeface="Calibri"/>
+              </a:rPr>
+              <a:t>• All references verified against Crossref</a:t>
+            </a:r>
           </a:p>
         </p:txBody>
       </p:sp>
@@ -42028,243 +42954,733 @@
       </p:sp>
       <p:sp>
         <p:nvSpPr>
-          <p:cNvPr id="499" name="Google Shape;499;p48"/>
-          <p:cNvSpPr txBox="1"/>
+          <p:cNvPr id="499" name="Rounded Rectangle 498"/>
+          <p:cNvSpPr/>
           <p:nvPr/>
         </p:nvSpPr>
         <p:spPr>
           <a:xfrm>
-            <a:off x="480073" y="891540"/>
-            <a:ext cx="8229819" cy="3771900"/>
-          </a:xfrm>
-          <a:prstGeom prst="rect">
-            <a:avLst/>
-          </a:prstGeom>
-          <a:noFill/>
+            <a:off x="484632" y="960120"/>
+            <a:ext cx="3840480" cy="1024128"/>
+          </a:xfrm>
+          <a:prstGeom prst="roundRect">
+            <a:avLst/>
+          </a:prstGeom>
+          <a:solidFill>
+            <a:srgbClr val="FFFFFF"/>
+          </a:solidFill>
           <a:ln>
             <a:noFill/>
           </a:ln>
-        </p:spPr>
-        <p:txBody>
-          <a:bodyPr anchorCtr="0" anchor="t" bIns="34275" lIns="68575" spcFirstLastPara="1" rIns="68575" wrap="square" tIns="34275">
-            <a:spAutoFit/>
-          </a:bodyPr>
+          <a:effectLst/>
+        </p:spPr>
+        <p:style>
+          <a:lnRef idx="1">
+            <a:schemeClr val="accent1"/>
+          </a:lnRef>
+          <a:fillRef idx="3">
+            <a:schemeClr val="accent1"/>
+          </a:fillRef>
+          <a:effectRef idx="2">
+            <a:schemeClr val="accent1"/>
+          </a:effectRef>
+          <a:fontRef idx="minor">
+            <a:schemeClr val="lt1"/>
+          </a:fontRef>
+        </p:style>
+        <p:txBody>
+          <a:bodyPr rtlCol="0" anchor="ctr" wrap="square"/>
           <a:lstStyle/>
           <a:p>
-            <a:pPr indent="0" lvl="0" marL="0" marR="0" rtl="0" algn="l">
-              <a:lnSpc>
-                <a:spcPct val="150000"/>
-              </a:lnSpc>
-              <a:spcBef>
-                <a:spcPts val="0"/>
-              </a:spcBef>
-              <a:spcAft>
-                <a:spcPts val="0"/>
-              </a:spcAft>
-              <a:buNone/>
-            </a:pPr>
-            <a:r>
-              <a:rPr b="0" i="0" lang="en" sz="1200" u="none" cap="none" strike="noStrike">
+            <a:pPr algn="ctr"/>
+            <a:r>
+              <a:rPr sz="1250" b="1">
+                <a:solidFill>
+                  <a:srgbClr val="9B1C2E"/>
+                </a:solidFill>
+                <a:latin typeface="Georgia"/>
+              </a:rPr>
+              <a:t>Medicine Stock Database</a:t>
+            </a:r>
+          </a:p>
+          <a:p>
+            <a:pPr algn="ctr"/>
+            <a:r>
+              <a:rPr sz="1100" b="0">
                 <a:solidFill>
                   <a:srgbClr val="101010"/>
                 </a:solidFill>
                 <a:latin typeface="Calibri"/>
-                <a:ea typeface="Calibri"/>
-                <a:cs typeface="Calibri"/>
-                <a:sym typeface="Calibri"/>
-              </a:rPr>
-              <a:t>• Medicine stock database — record how much of each medicine is in hand. Stock is</a:t>
-            </a:r>
-            <a:endParaRPr sz="1100"/>
-          </a:p>
-          <a:p>
-            <a:pPr indent="0" lvl="0" marL="0" marR="0" rtl="0" algn="l">
-              <a:lnSpc>
-                <a:spcPct val="150000"/>
-              </a:lnSpc>
-              <a:spcBef>
-                <a:spcPts val="0"/>
-              </a:spcBef>
-              <a:spcAft>
-                <a:spcPts val="0"/>
-              </a:spcAft>
-              <a:buNone/>
-            </a:pPr>
-            <a:r>
-              <a:rPr b="0" i="0" lang="en" sz="1200" u="none" cap="none" strike="noStrike">
+              </a:rPr>
+              <a:t>Track quantity in hand; stock falls as doses are taken</a:t>
+            </a:r>
+          </a:p>
+        </p:txBody>
+      </p:sp>
+      <p:sp>
+        <p:nvSpPr>
+          <p:cNvPr id="500" name="Oval 499"/>
+          <p:cNvSpPr/>
+          <p:nvPr/>
+        </p:nvSpPr>
+        <p:spPr>
+          <a:xfrm>
+            <a:off x="2267712" y="786384"/>
+            <a:ext cx="347472" cy="347472"/>
+          </a:xfrm>
+          <a:prstGeom prst="ellipse">
+            <a:avLst/>
+          </a:prstGeom>
+          <a:solidFill>
+            <a:srgbClr val="101010"/>
+          </a:solidFill>
+          <a:ln>
+            <a:noFill/>
+          </a:ln>
+          <a:effectLst/>
+        </p:spPr>
+        <p:style>
+          <a:lnRef idx="1">
+            <a:schemeClr val="accent1"/>
+          </a:lnRef>
+          <a:fillRef idx="3">
+            <a:schemeClr val="accent1"/>
+          </a:fillRef>
+          <a:effectRef idx="2">
+            <a:schemeClr val="accent1"/>
+          </a:effectRef>
+          <a:fontRef idx="minor">
+            <a:schemeClr val="lt1"/>
+          </a:fontRef>
+        </p:style>
+        <p:txBody>
+          <a:bodyPr rtlCol="0" anchor="ctr" wrap="square" lIns="73152" rIns="73152" tIns="36576" bIns="36576"/>
+          <a:lstStyle/>
+          <a:p>
+            <a:pPr algn="ctr">
+              <a:spcAft>
+                <a:spcPts val="0"/>
+              </a:spcAft>
+            </a:pPr>
+            <a:r>
+              <a:rPr sz="1200" b="1">
+                <a:solidFill>
+                  <a:srgbClr val="FFFFFF"/>
+                </a:solidFill>
+                <a:latin typeface="Georgia"/>
+              </a:rPr>
+              <a:t>1</a:t>
+            </a:r>
+          </a:p>
+        </p:txBody>
+      </p:sp>
+      <p:sp>
+        <p:nvSpPr>
+          <p:cNvPr id="501" name="Rounded Rectangle 500"/>
+          <p:cNvSpPr/>
+          <p:nvPr/>
+        </p:nvSpPr>
+        <p:spPr>
+          <a:xfrm>
+            <a:off x="4800600" y="960120"/>
+            <a:ext cx="3840480" cy="1024128"/>
+          </a:xfrm>
+          <a:prstGeom prst="roundRect">
+            <a:avLst/>
+          </a:prstGeom>
+          <a:solidFill>
+            <a:srgbClr val="FFFFFF"/>
+          </a:solidFill>
+          <a:ln>
+            <a:noFill/>
+          </a:ln>
+          <a:effectLst/>
+        </p:spPr>
+        <p:style>
+          <a:lnRef idx="1">
+            <a:schemeClr val="accent1"/>
+          </a:lnRef>
+          <a:fillRef idx="3">
+            <a:schemeClr val="accent1"/>
+          </a:fillRef>
+          <a:effectRef idx="2">
+            <a:schemeClr val="accent1"/>
+          </a:effectRef>
+          <a:fontRef idx="minor">
+            <a:schemeClr val="lt1"/>
+          </a:fontRef>
+        </p:style>
+        <p:txBody>
+          <a:bodyPr rtlCol="0" anchor="ctr" wrap="square"/>
+          <a:lstStyle/>
+          <a:p>
+            <a:pPr algn="ctr"/>
+            <a:r>
+              <a:rPr sz="1250" b="1">
+                <a:solidFill>
+                  <a:srgbClr val="9B1C2E"/>
+                </a:solidFill>
+                <a:latin typeface="Georgia"/>
+              </a:rPr>
+              <a:t>Low-Stock Alerts</a:t>
+            </a:r>
+          </a:p>
+          <a:p>
+            <a:pPr algn="ctr"/>
+            <a:r>
+              <a:rPr sz="1100" b="0">
                 <a:solidFill>
                   <a:srgbClr val="101010"/>
                 </a:solidFill>
                 <a:latin typeface="Calibri"/>
-                <a:ea typeface="Calibri"/>
-                <a:cs typeface="Calibri"/>
-                <a:sym typeface="Calibri"/>
-              </a:rPr>
-              <a:t>   reduced automatically as the elder marks doses taken, and the guardian is notified</a:t>
-            </a:r>
-            <a:endParaRPr sz="1100"/>
-          </a:p>
-          <a:p>
-            <a:pPr indent="0" lvl="0" marL="0" marR="0" rtl="0" algn="l">
-              <a:lnSpc>
-                <a:spcPct val="150000"/>
-              </a:lnSpc>
-              <a:spcBef>
-                <a:spcPts val="0"/>
-              </a:spcBef>
-              <a:spcAft>
-                <a:spcPts val="0"/>
-              </a:spcAft>
-              <a:buNone/>
-            </a:pPr>
-            <a:r>
-              <a:rPr b="0" i="0" lang="en" sz="1200" u="none" cap="none" strike="noStrike">
+              </a:rPr>
+              <a:t>Guardian notified before a medicine runs out, to restock in time</a:t>
+            </a:r>
+          </a:p>
+        </p:txBody>
+      </p:sp>
+      <p:sp>
+        <p:nvSpPr>
+          <p:cNvPr id="502" name="Oval 501"/>
+          <p:cNvSpPr/>
+          <p:nvPr/>
+        </p:nvSpPr>
+        <p:spPr>
+          <a:xfrm>
+            <a:off x="6583680" y="786384"/>
+            <a:ext cx="347472" cy="347472"/>
+          </a:xfrm>
+          <a:prstGeom prst="ellipse">
+            <a:avLst/>
+          </a:prstGeom>
+          <a:solidFill>
+            <a:srgbClr val="101010"/>
+          </a:solidFill>
+          <a:ln>
+            <a:noFill/>
+          </a:ln>
+          <a:effectLst/>
+        </p:spPr>
+        <p:style>
+          <a:lnRef idx="1">
+            <a:schemeClr val="accent1"/>
+          </a:lnRef>
+          <a:fillRef idx="3">
+            <a:schemeClr val="accent1"/>
+          </a:fillRef>
+          <a:effectRef idx="2">
+            <a:schemeClr val="accent1"/>
+          </a:effectRef>
+          <a:fontRef idx="minor">
+            <a:schemeClr val="lt1"/>
+          </a:fontRef>
+        </p:style>
+        <p:txBody>
+          <a:bodyPr rtlCol="0" anchor="ctr" wrap="square" lIns="73152" rIns="73152" tIns="36576" bIns="36576"/>
+          <a:lstStyle/>
+          <a:p>
+            <a:pPr algn="ctr">
+              <a:spcAft>
+                <a:spcPts val="0"/>
+              </a:spcAft>
+            </a:pPr>
+            <a:r>
+              <a:rPr sz="1200" b="1">
+                <a:solidFill>
+                  <a:srgbClr val="FFFFFF"/>
+                </a:solidFill>
+                <a:latin typeface="Georgia"/>
+              </a:rPr>
+              <a:t>2</a:t>
+            </a:r>
+          </a:p>
+        </p:txBody>
+      </p:sp>
+      <p:sp>
+        <p:nvSpPr>
+          <p:cNvPr id="503" name="Rounded Rectangle 502"/>
+          <p:cNvSpPr/>
+          <p:nvPr/>
+        </p:nvSpPr>
+        <p:spPr>
+          <a:xfrm>
+            <a:off x="484632" y="2194560"/>
+            <a:ext cx="3840480" cy="1024128"/>
+          </a:xfrm>
+          <a:prstGeom prst="roundRect">
+            <a:avLst/>
+          </a:prstGeom>
+          <a:solidFill>
+            <a:srgbClr val="FFFFFF"/>
+          </a:solidFill>
+          <a:ln>
+            <a:noFill/>
+          </a:ln>
+          <a:effectLst/>
+        </p:spPr>
+        <p:style>
+          <a:lnRef idx="1">
+            <a:schemeClr val="accent1"/>
+          </a:lnRef>
+          <a:fillRef idx="3">
+            <a:schemeClr val="accent1"/>
+          </a:fillRef>
+          <a:effectRef idx="2">
+            <a:schemeClr val="accent1"/>
+          </a:effectRef>
+          <a:fontRef idx="minor">
+            <a:schemeClr val="lt1"/>
+          </a:fontRef>
+        </p:style>
+        <p:txBody>
+          <a:bodyPr rtlCol="0" anchor="ctr" wrap="square"/>
+          <a:lstStyle/>
+          <a:p>
+            <a:pPr algn="ctr"/>
+            <a:r>
+              <a:rPr sz="1250" b="1">
+                <a:solidFill>
+                  <a:srgbClr val="9B1C2E"/>
+                </a:solidFill>
+                <a:latin typeface="Georgia"/>
+              </a:rPr>
+              <a:t>iOS Application</a:t>
+            </a:r>
+          </a:p>
+          <a:p>
+            <a:pPr algn="ctr"/>
+            <a:r>
+              <a:rPr sz="1100" b="0">
                 <a:solidFill>
                   <a:srgbClr val="101010"/>
                 </a:solidFill>
                 <a:latin typeface="Calibri"/>
-                <a:ea typeface="Calibri"/>
-                <a:cs typeface="Calibri"/>
-                <a:sym typeface="Calibri"/>
-              </a:rPr>
-              <a:t>   when a medicine is running low so it can be restocked before it runs out.</a:t>
-            </a:r>
-            <a:endParaRPr sz="1100"/>
-          </a:p>
-          <a:p>
-            <a:pPr indent="0" lvl="0" marL="0" marR="0" rtl="0" algn="l">
-              <a:lnSpc>
-                <a:spcPct val="150000"/>
-              </a:lnSpc>
-              <a:spcBef>
-                <a:spcPts val="0"/>
-              </a:spcBef>
-              <a:spcAft>
-                <a:spcPts val="0"/>
-              </a:spcAft>
-              <a:buNone/>
-            </a:pPr>
-            <a:r>
-              <a:rPr b="0" i="0" lang="en" sz="1200" u="none" cap="none" strike="noStrike">
+              </a:rPr>
+              <a:t>Extend CareCompanion to iPhone users</a:t>
+            </a:r>
+          </a:p>
+        </p:txBody>
+      </p:sp>
+      <p:sp>
+        <p:nvSpPr>
+          <p:cNvPr id="504" name="Oval 503"/>
+          <p:cNvSpPr/>
+          <p:nvPr/>
+        </p:nvSpPr>
+        <p:spPr>
+          <a:xfrm>
+            <a:off x="2267712" y="2020824"/>
+            <a:ext cx="347472" cy="347472"/>
+          </a:xfrm>
+          <a:prstGeom prst="ellipse">
+            <a:avLst/>
+          </a:prstGeom>
+          <a:solidFill>
+            <a:srgbClr val="101010"/>
+          </a:solidFill>
+          <a:ln>
+            <a:noFill/>
+          </a:ln>
+          <a:effectLst/>
+        </p:spPr>
+        <p:style>
+          <a:lnRef idx="1">
+            <a:schemeClr val="accent1"/>
+          </a:lnRef>
+          <a:fillRef idx="3">
+            <a:schemeClr val="accent1"/>
+          </a:fillRef>
+          <a:effectRef idx="2">
+            <a:schemeClr val="accent1"/>
+          </a:effectRef>
+          <a:fontRef idx="minor">
+            <a:schemeClr val="lt1"/>
+          </a:fontRef>
+        </p:style>
+        <p:txBody>
+          <a:bodyPr rtlCol="0" anchor="ctr" wrap="square" lIns="73152" rIns="73152" tIns="36576" bIns="36576"/>
+          <a:lstStyle/>
+          <a:p>
+            <a:pPr algn="ctr">
+              <a:spcAft>
+                <a:spcPts val="0"/>
+              </a:spcAft>
+            </a:pPr>
+            <a:r>
+              <a:rPr sz="1200" b="1">
+                <a:solidFill>
+                  <a:srgbClr val="FFFFFF"/>
+                </a:solidFill>
+                <a:latin typeface="Georgia"/>
+              </a:rPr>
+              <a:t>3</a:t>
+            </a:r>
+          </a:p>
+        </p:txBody>
+      </p:sp>
+      <p:sp>
+        <p:nvSpPr>
+          <p:cNvPr id="505" name="Rounded Rectangle 504"/>
+          <p:cNvSpPr/>
+          <p:nvPr/>
+        </p:nvSpPr>
+        <p:spPr>
+          <a:xfrm>
+            <a:off x="4800600" y="2194560"/>
+            <a:ext cx="3840480" cy="1024128"/>
+          </a:xfrm>
+          <a:prstGeom prst="roundRect">
+            <a:avLst/>
+          </a:prstGeom>
+          <a:solidFill>
+            <a:srgbClr val="FFFFFF"/>
+          </a:solidFill>
+          <a:ln>
+            <a:noFill/>
+          </a:ln>
+          <a:effectLst/>
+        </p:spPr>
+        <p:style>
+          <a:lnRef idx="1">
+            <a:schemeClr val="accent1"/>
+          </a:lnRef>
+          <a:fillRef idx="3">
+            <a:schemeClr val="accent1"/>
+          </a:fillRef>
+          <a:effectRef idx="2">
+            <a:schemeClr val="accent1"/>
+          </a:effectRef>
+          <a:fontRef idx="minor">
+            <a:schemeClr val="lt1"/>
+          </a:fontRef>
+        </p:style>
+        <p:txBody>
+          <a:bodyPr rtlCol="0" anchor="ctr" wrap="square"/>
+          <a:lstStyle/>
+          <a:p>
+            <a:pPr algn="ctr"/>
+            <a:r>
+              <a:rPr sz="1250" b="1">
+                <a:solidFill>
+                  <a:srgbClr val="9B1C2E"/>
+                </a:solidFill>
+                <a:latin typeface="Georgia"/>
+              </a:rPr>
+              <a:t>Google Play Release</a:t>
+            </a:r>
+          </a:p>
+          <a:p>
+            <a:pPr algn="ctr"/>
+            <a:r>
+              <a:rPr sz="1100" b="0">
                 <a:solidFill>
                   <a:srgbClr val="101010"/>
                 </a:solidFill>
                 <a:latin typeface="Calibri"/>
-                <a:ea typeface="Calibri"/>
-                <a:cs typeface="Calibri"/>
-                <a:sym typeface="Calibri"/>
-              </a:rPr>
-              <a:t>• iOS application — extend CareCompanion to iPhone so elders on iOS are covered.</a:t>
-            </a:r>
-            <a:endParaRPr sz="1100"/>
-          </a:p>
-          <a:p>
-            <a:pPr indent="0" lvl="0" marL="0" marR="0" rtl="0" algn="l">
-              <a:lnSpc>
-                <a:spcPct val="150000"/>
-              </a:lnSpc>
-              <a:spcBef>
-                <a:spcPts val="0"/>
-              </a:spcBef>
-              <a:spcAft>
-                <a:spcPts val="0"/>
-              </a:spcAft>
-              <a:buNone/>
-            </a:pPr>
-            <a:r>
-              <a:rPr b="0" i="0" lang="en" sz="1200" u="none" cap="none" strike="noStrike">
+              </a:rPr>
+              <a:t>Publish for public distribution and real-world use</a:t>
+            </a:r>
+          </a:p>
+        </p:txBody>
+      </p:sp>
+      <p:sp>
+        <p:nvSpPr>
+          <p:cNvPr id="506" name="Oval 505"/>
+          <p:cNvSpPr/>
+          <p:nvPr/>
+        </p:nvSpPr>
+        <p:spPr>
+          <a:xfrm>
+            <a:off x="6583680" y="2020824"/>
+            <a:ext cx="347472" cy="347472"/>
+          </a:xfrm>
+          <a:prstGeom prst="ellipse">
+            <a:avLst/>
+          </a:prstGeom>
+          <a:solidFill>
+            <a:srgbClr val="101010"/>
+          </a:solidFill>
+          <a:ln>
+            <a:noFill/>
+          </a:ln>
+          <a:effectLst/>
+        </p:spPr>
+        <p:style>
+          <a:lnRef idx="1">
+            <a:schemeClr val="accent1"/>
+          </a:lnRef>
+          <a:fillRef idx="3">
+            <a:schemeClr val="accent1"/>
+          </a:fillRef>
+          <a:effectRef idx="2">
+            <a:schemeClr val="accent1"/>
+          </a:effectRef>
+          <a:fontRef idx="minor">
+            <a:schemeClr val="lt1"/>
+          </a:fontRef>
+        </p:style>
+        <p:txBody>
+          <a:bodyPr rtlCol="0" anchor="ctr" wrap="square" lIns="73152" rIns="73152" tIns="36576" bIns="36576"/>
+          <a:lstStyle/>
+          <a:p>
+            <a:pPr algn="ctr">
+              <a:spcAft>
+                <a:spcPts val="0"/>
+              </a:spcAft>
+            </a:pPr>
+            <a:r>
+              <a:rPr sz="1200" b="1">
+                <a:solidFill>
+                  <a:srgbClr val="FFFFFF"/>
+                </a:solidFill>
+                <a:latin typeface="Georgia"/>
+              </a:rPr>
+              <a:t>4</a:t>
+            </a:r>
+          </a:p>
+        </p:txBody>
+      </p:sp>
+      <p:sp>
+        <p:nvSpPr>
+          <p:cNvPr id="507" name="Rounded Rectangle 506"/>
+          <p:cNvSpPr/>
+          <p:nvPr/>
+        </p:nvSpPr>
+        <p:spPr>
+          <a:xfrm>
+            <a:off x="484632" y="3429000"/>
+            <a:ext cx="3840480" cy="1024128"/>
+          </a:xfrm>
+          <a:prstGeom prst="roundRect">
+            <a:avLst/>
+          </a:prstGeom>
+          <a:solidFill>
+            <a:srgbClr val="FFFFFF"/>
+          </a:solidFill>
+          <a:ln>
+            <a:noFill/>
+          </a:ln>
+          <a:effectLst/>
+        </p:spPr>
+        <p:style>
+          <a:lnRef idx="1">
+            <a:schemeClr val="accent1"/>
+          </a:lnRef>
+          <a:fillRef idx="3">
+            <a:schemeClr val="accent1"/>
+          </a:fillRef>
+          <a:effectRef idx="2">
+            <a:schemeClr val="accent1"/>
+          </a:effectRef>
+          <a:fontRef idx="minor">
+            <a:schemeClr val="lt1"/>
+          </a:fontRef>
+        </p:style>
+        <p:txBody>
+          <a:bodyPr rtlCol="0" anchor="ctr" wrap="square"/>
+          <a:lstStyle/>
+          <a:p>
+            <a:pPr algn="ctr"/>
+            <a:r>
+              <a:rPr sz="1250" b="1">
+                <a:solidFill>
+                  <a:srgbClr val="9B1C2E"/>
+                </a:solidFill>
+                <a:latin typeface="Georgia"/>
+              </a:rPr>
+              <a:t>User Study</a:t>
+            </a:r>
+          </a:p>
+          <a:p>
+            <a:pPr algn="ctr"/>
+            <a:r>
+              <a:rPr sz="1100" b="0">
                 <a:solidFill>
                   <a:srgbClr val="101010"/>
                 </a:solidFill>
                 <a:latin typeface="Calibri"/>
-                <a:ea typeface="Calibri"/>
-                <a:cs typeface="Calibri"/>
-                <a:sym typeface="Calibri"/>
-              </a:rPr>
-              <a:t>• Publish on the Google Play Store for public distribution and real-world use.</a:t>
-            </a:r>
-            <a:endParaRPr sz="1100"/>
-          </a:p>
-          <a:p>
-            <a:pPr indent="0" lvl="0" marL="0" marR="0" rtl="0" algn="l">
-              <a:lnSpc>
-                <a:spcPct val="150000"/>
-              </a:lnSpc>
-              <a:spcBef>
-                <a:spcPts val="0"/>
-              </a:spcBef>
-              <a:spcAft>
-                <a:spcPts val="0"/>
-              </a:spcAft>
-              <a:buNone/>
-            </a:pPr>
-            <a:r>
-              <a:rPr b="0" i="0" lang="en" sz="1200" u="none" cap="none" strike="noStrike">
+              </a:rPr>
+              <a:t>Evaluate with elderly participants and their caregivers</a:t>
+            </a:r>
+          </a:p>
+        </p:txBody>
+      </p:sp>
+      <p:sp>
+        <p:nvSpPr>
+          <p:cNvPr id="508" name="Oval 507"/>
+          <p:cNvSpPr/>
+          <p:nvPr/>
+        </p:nvSpPr>
+        <p:spPr>
+          <a:xfrm>
+            <a:off x="2267712" y="3255264"/>
+            <a:ext cx="347472" cy="347472"/>
+          </a:xfrm>
+          <a:prstGeom prst="ellipse">
+            <a:avLst/>
+          </a:prstGeom>
+          <a:solidFill>
+            <a:srgbClr val="101010"/>
+          </a:solidFill>
+          <a:ln>
+            <a:noFill/>
+          </a:ln>
+          <a:effectLst/>
+        </p:spPr>
+        <p:style>
+          <a:lnRef idx="1">
+            <a:schemeClr val="accent1"/>
+          </a:lnRef>
+          <a:fillRef idx="3">
+            <a:schemeClr val="accent1"/>
+          </a:fillRef>
+          <a:effectRef idx="2">
+            <a:schemeClr val="accent1"/>
+          </a:effectRef>
+          <a:fontRef idx="minor">
+            <a:schemeClr val="lt1"/>
+          </a:fontRef>
+        </p:style>
+        <p:txBody>
+          <a:bodyPr rtlCol="0" anchor="ctr" wrap="square" lIns="73152" rIns="73152" tIns="36576" bIns="36576"/>
+          <a:lstStyle/>
+          <a:p>
+            <a:pPr algn="ctr">
+              <a:spcAft>
+                <a:spcPts val="0"/>
+              </a:spcAft>
+            </a:pPr>
+            <a:r>
+              <a:rPr sz="1200" b="1">
+                <a:solidFill>
+                  <a:srgbClr val="FFFFFF"/>
+                </a:solidFill>
+                <a:latin typeface="Georgia"/>
+              </a:rPr>
+              <a:t>5</a:t>
+            </a:r>
+          </a:p>
+        </p:txBody>
+      </p:sp>
+      <p:sp>
+        <p:nvSpPr>
+          <p:cNvPr id="509" name="Rounded Rectangle 508"/>
+          <p:cNvSpPr/>
+          <p:nvPr/>
+        </p:nvSpPr>
+        <p:spPr>
+          <a:xfrm>
+            <a:off x="4800600" y="3429000"/>
+            <a:ext cx="3840480" cy="1024128"/>
+          </a:xfrm>
+          <a:prstGeom prst="roundRect">
+            <a:avLst/>
+          </a:prstGeom>
+          <a:solidFill>
+            <a:srgbClr val="FFFFFF"/>
+          </a:solidFill>
+          <a:ln>
+            <a:noFill/>
+          </a:ln>
+          <a:effectLst/>
+        </p:spPr>
+        <p:style>
+          <a:lnRef idx="1">
+            <a:schemeClr val="accent1"/>
+          </a:lnRef>
+          <a:fillRef idx="3">
+            <a:schemeClr val="accent1"/>
+          </a:fillRef>
+          <a:effectRef idx="2">
+            <a:schemeClr val="accent1"/>
+          </a:effectRef>
+          <a:fontRef idx="minor">
+            <a:schemeClr val="lt1"/>
+          </a:fontRef>
+        </p:style>
+        <p:txBody>
+          <a:bodyPr rtlCol="0" anchor="ctr" wrap="square"/>
+          <a:lstStyle/>
+          <a:p>
+            <a:pPr algn="ctr"/>
+            <a:r>
+              <a:rPr sz="1250" b="1">
+                <a:solidFill>
+                  <a:srgbClr val="9B1C2E"/>
+                </a:solidFill>
+                <a:latin typeface="Georgia"/>
+              </a:rPr>
+              <a:t>Voice &amp; Vernacular Input</a:t>
+            </a:r>
+          </a:p>
+          <a:p>
+            <a:pPr algn="ctr"/>
+            <a:r>
+              <a:rPr sz="1100" b="0">
                 <a:solidFill>
                   <a:srgbClr val="101010"/>
                 </a:solidFill>
                 <a:latin typeface="Calibri"/>
-                <a:ea typeface="Calibri"/>
-                <a:cs typeface="Calibri"/>
-                <a:sym typeface="Calibri"/>
-              </a:rPr>
-              <a:t>• Conduct a user study with elderly participants and their caregivers.</a:t>
-            </a:r>
-            <a:endParaRPr sz="1100"/>
-          </a:p>
-          <a:p>
-            <a:pPr indent="0" lvl="0" marL="0" marR="0" rtl="0" algn="l">
-              <a:lnSpc>
-                <a:spcPct val="150000"/>
-              </a:lnSpc>
-              <a:spcBef>
-                <a:spcPts val="0"/>
-              </a:spcBef>
-              <a:spcAft>
-                <a:spcPts val="0"/>
-              </a:spcAft>
-              <a:buNone/>
-            </a:pPr>
-            <a:r>
-              <a:rPr b="0" i="0" lang="en" sz="1200" u="none" cap="none" strike="noStrike">
-                <a:solidFill>
-                  <a:srgbClr val="101010"/>
-                </a:solidFill>
-                <a:latin typeface="Calibri"/>
-                <a:ea typeface="Calibri"/>
-                <a:cs typeface="Calibri"/>
-                <a:sym typeface="Calibri"/>
-              </a:rPr>
-              <a:t>• Voice input and vernacular speech support for users who find typing difficult.</a:t>
-            </a:r>
-            <a:endParaRPr sz="1100"/>
-          </a:p>
-          <a:p>
-            <a:pPr indent="0" lvl="0" marL="0" marR="0" rtl="0" algn="l">
-              <a:lnSpc>
-                <a:spcPct val="150000"/>
-              </a:lnSpc>
-              <a:spcBef>
-                <a:spcPts val="0"/>
-              </a:spcBef>
-              <a:spcAft>
-                <a:spcPts val="0"/>
-              </a:spcAft>
-              <a:buNone/>
-            </a:pPr>
-            <a:r>
-              <a:rPr b="0" i="0" lang="en" sz="1200" u="none" cap="none" strike="noStrike">
-                <a:solidFill>
-                  <a:srgbClr val="101010"/>
-                </a:solidFill>
-                <a:latin typeface="Calibri"/>
-                <a:ea typeface="Calibri"/>
-                <a:cs typeface="Calibri"/>
-                <a:sym typeface="Calibri"/>
-              </a:rPr>
-              <a:t>• Integration with pharmacies or clinics for prescription and refill data.</a:t>
-            </a:r>
-            <a:endParaRPr sz="1100"/>
+              </a:rPr>
+              <a:t>Speech support for users who find typing difficult</a:t>
+            </a:r>
+          </a:p>
+        </p:txBody>
+      </p:sp>
+      <p:sp>
+        <p:nvSpPr>
+          <p:cNvPr id="510" name="Oval 509"/>
+          <p:cNvSpPr/>
+          <p:nvPr/>
+        </p:nvSpPr>
+        <p:spPr>
+          <a:xfrm>
+            <a:off x="6583680" y="3255264"/>
+            <a:ext cx="347472" cy="347472"/>
+          </a:xfrm>
+          <a:prstGeom prst="ellipse">
+            <a:avLst/>
+          </a:prstGeom>
+          <a:solidFill>
+            <a:srgbClr val="101010"/>
+          </a:solidFill>
+          <a:ln>
+            <a:noFill/>
+          </a:ln>
+          <a:effectLst/>
+        </p:spPr>
+        <p:style>
+          <a:lnRef idx="1">
+            <a:schemeClr val="accent1"/>
+          </a:lnRef>
+          <a:fillRef idx="3">
+            <a:schemeClr val="accent1"/>
+          </a:fillRef>
+          <a:effectRef idx="2">
+            <a:schemeClr val="accent1"/>
+          </a:effectRef>
+          <a:fontRef idx="minor">
+            <a:schemeClr val="lt1"/>
+          </a:fontRef>
+        </p:style>
+        <p:txBody>
+          <a:bodyPr rtlCol="0" anchor="ctr" wrap="square" lIns="73152" rIns="73152" tIns="36576" bIns="36576"/>
+          <a:lstStyle/>
+          <a:p>
+            <a:pPr algn="ctr">
+              <a:spcAft>
+                <a:spcPts val="0"/>
+              </a:spcAft>
+            </a:pPr>
+            <a:r>
+              <a:rPr sz="1200" b="1">
+                <a:solidFill>
+                  <a:srgbClr val="FFFFFF"/>
+                </a:solidFill>
+                <a:latin typeface="Georgia"/>
+              </a:rPr>
+              <a:t>6</a:t>
+            </a:r>
           </a:p>
         </p:txBody>
       </p:sp>
@@ -42662,162 +44078,733 @@
       </p:sp>
       <p:sp>
         <p:nvSpPr>
-          <p:cNvPr id="499" name="Google Shape;499;p48"/>
-          <p:cNvSpPr txBox="1"/>
+          <p:cNvPr id="499" name="Rounded Rectangle 498"/>
+          <p:cNvSpPr/>
           <p:nvPr/>
         </p:nvSpPr>
         <p:spPr>
           <a:xfrm>
-            <a:off x="480073" y="891540"/>
-            <a:ext cx="8229819" cy="3771900"/>
-          </a:xfrm>
-          <a:prstGeom prst="rect">
-            <a:avLst/>
-          </a:prstGeom>
-          <a:noFill/>
+            <a:off x="484632" y="960120"/>
+            <a:ext cx="3840480" cy="1024128"/>
+          </a:xfrm>
+          <a:prstGeom prst="roundRect">
+            <a:avLst/>
+          </a:prstGeom>
+          <a:solidFill>
+            <a:srgbClr val="FFFFFF"/>
+          </a:solidFill>
           <a:ln>
             <a:noFill/>
           </a:ln>
-        </p:spPr>
-        <p:txBody>
-          <a:bodyPr anchorCtr="0" anchor="t" bIns="34275" lIns="68575" spcFirstLastPara="1" rIns="68575" wrap="square" tIns="34275">
-            <a:spAutoFit/>
-          </a:bodyPr>
+          <a:effectLst/>
+        </p:spPr>
+        <p:style>
+          <a:lnRef idx="1">
+            <a:schemeClr val="accent1"/>
+          </a:lnRef>
+          <a:fillRef idx="3">
+            <a:schemeClr val="accent1"/>
+          </a:fillRef>
+          <a:effectRef idx="2">
+            <a:schemeClr val="accent1"/>
+          </a:effectRef>
+          <a:fontRef idx="minor">
+            <a:schemeClr val="lt1"/>
+          </a:fontRef>
+        </p:style>
+        <p:txBody>
+          <a:bodyPr rtlCol="0" anchor="ctr" wrap="square"/>
           <a:lstStyle/>
           <a:p>
-            <a:pPr indent="0" lvl="0" marL="0" marR="0" rtl="0" algn="l">
-              <a:lnSpc>
-                <a:spcPct val="150000"/>
-              </a:lnSpc>
-              <a:spcBef>
-                <a:spcPts val="0"/>
-              </a:spcBef>
-              <a:spcAft>
-                <a:spcPts val="0"/>
-              </a:spcAft>
-              <a:buNone/>
-            </a:pPr>
-            <a:r>
-              <a:rPr b="0" i="0" lang="en" sz="1300" u="none" cap="none" strike="noStrike">
+            <a:pPr algn="ctr"/>
+            <a:r>
+              <a:rPr sz="1250" b="1">
+                <a:solidFill>
+                  <a:srgbClr val="9B1C2E"/>
+                </a:solidFill>
+                <a:latin typeface="Georgia"/>
+              </a:rPr>
+              <a:t>Source Code</a:t>
+            </a:r>
+          </a:p>
+          <a:p>
+            <a:pPr algn="ctr"/>
+            <a:r>
+              <a:rPr sz="1100" b="0">
                 <a:solidFill>
                   <a:srgbClr val="101010"/>
                 </a:solidFill>
                 <a:latin typeface="Calibri"/>
-                <a:ea typeface="Calibri"/>
-                <a:cs typeface="Calibri"/>
-                <a:sym typeface="Calibri"/>
-              </a:rPr>
-              <a:t>• Source code (GitHub): https://github.com/Suyash2205/Care-Companion-</a:t>
-            </a:r>
-            <a:endParaRPr sz="1100"/>
-          </a:p>
-          <a:p>
-            <a:pPr indent="0" lvl="0" marL="0" marR="0" rtl="0" algn="l">
-              <a:lnSpc>
-                <a:spcPct val="150000"/>
-              </a:lnSpc>
-              <a:spcBef>
-                <a:spcPts val="0"/>
-              </a:spcBef>
-              <a:spcAft>
-                <a:spcPts val="0"/>
-              </a:spcAft>
-              <a:buNone/>
-            </a:pPr>
-            <a:r>
-              <a:rPr b="0" i="0" lang="en" sz="1300" u="none" cap="none" strike="noStrike">
+              </a:rPr>
+              <a:t>github.com/Suyash2205/Care-Companion-</a:t>
+            </a:r>
+          </a:p>
+        </p:txBody>
+      </p:sp>
+      <p:sp>
+        <p:nvSpPr>
+          <p:cNvPr id="500" name="Oval 499"/>
+          <p:cNvSpPr/>
+          <p:nvPr/>
+        </p:nvSpPr>
+        <p:spPr>
+          <a:xfrm>
+            <a:off x="2267712" y="786384"/>
+            <a:ext cx="347472" cy="347472"/>
+          </a:xfrm>
+          <a:prstGeom prst="ellipse">
+            <a:avLst/>
+          </a:prstGeom>
+          <a:solidFill>
+            <a:srgbClr val="101010"/>
+          </a:solidFill>
+          <a:ln>
+            <a:noFill/>
+          </a:ln>
+          <a:effectLst/>
+        </p:spPr>
+        <p:style>
+          <a:lnRef idx="1">
+            <a:schemeClr val="accent1"/>
+          </a:lnRef>
+          <a:fillRef idx="3">
+            <a:schemeClr val="accent1"/>
+          </a:fillRef>
+          <a:effectRef idx="2">
+            <a:schemeClr val="accent1"/>
+          </a:effectRef>
+          <a:fontRef idx="minor">
+            <a:schemeClr val="lt1"/>
+          </a:fontRef>
+        </p:style>
+        <p:txBody>
+          <a:bodyPr rtlCol="0" anchor="ctr" wrap="square" lIns="73152" rIns="73152" tIns="36576" bIns="36576"/>
+          <a:lstStyle/>
+          <a:p>
+            <a:pPr algn="ctr">
+              <a:spcAft>
+                <a:spcPts val="0"/>
+              </a:spcAft>
+            </a:pPr>
+            <a:r>
+              <a:rPr sz="1200" b="1">
+                <a:solidFill>
+                  <a:srgbClr val="FFFFFF"/>
+                </a:solidFill>
+                <a:latin typeface="Georgia"/>
+              </a:rPr>
+              <a:t>1</a:t>
+            </a:r>
+          </a:p>
+        </p:txBody>
+      </p:sp>
+      <p:sp>
+        <p:nvSpPr>
+          <p:cNvPr id="501" name="Rounded Rectangle 500"/>
+          <p:cNvSpPr/>
+          <p:nvPr/>
+        </p:nvSpPr>
+        <p:spPr>
+          <a:xfrm>
+            <a:off x="4800600" y="960120"/>
+            <a:ext cx="3840480" cy="1024128"/>
+          </a:xfrm>
+          <a:prstGeom prst="roundRect">
+            <a:avLst/>
+          </a:prstGeom>
+          <a:solidFill>
+            <a:srgbClr val="FFFFFF"/>
+          </a:solidFill>
+          <a:ln>
+            <a:noFill/>
+          </a:ln>
+          <a:effectLst/>
+        </p:spPr>
+        <p:style>
+          <a:lnRef idx="1">
+            <a:schemeClr val="accent1"/>
+          </a:lnRef>
+          <a:fillRef idx="3">
+            <a:schemeClr val="accent1"/>
+          </a:fillRef>
+          <a:effectRef idx="2">
+            <a:schemeClr val="accent1"/>
+          </a:effectRef>
+          <a:fontRef idx="minor">
+            <a:schemeClr val="lt1"/>
+          </a:fontRef>
+        </p:style>
+        <p:txBody>
+          <a:bodyPr rtlCol="0" anchor="ctr" wrap="square"/>
+          <a:lstStyle/>
+          <a:p>
+            <a:pPr algn="ctr"/>
+            <a:r>
+              <a:rPr sz="1250" b="1">
+                <a:solidFill>
+                  <a:srgbClr val="9B1C2E"/>
+                </a:solidFill>
+                <a:latin typeface="Georgia"/>
+              </a:rPr>
+              <a:t>Release APK</a:t>
+            </a:r>
+          </a:p>
+          <a:p>
+            <a:pPr algn="ctr"/>
+            <a:r>
+              <a:rPr sz="1100" b="0">
                 <a:solidFill>
                   <a:srgbClr val="101010"/>
                 </a:solidFill>
                 <a:latin typeface="Calibri"/>
-                <a:ea typeface="Calibri"/>
-                <a:cs typeface="Calibri"/>
-                <a:sym typeface="Calibri"/>
-              </a:rPr>
-              <a:t>• Release APK: https://github.com/Suyash2205/Care-Companion-/releases</a:t>
-            </a:r>
-            <a:endParaRPr sz="1100"/>
-          </a:p>
-          <a:p>
-            <a:pPr indent="0" lvl="0" marL="0" marR="0" rtl="0" algn="l">
-              <a:lnSpc>
-                <a:spcPct val="150000"/>
-              </a:lnSpc>
-              <a:spcBef>
-                <a:spcPts val="0"/>
-              </a:spcBef>
-              <a:spcAft>
-                <a:spcPts val="0"/>
-              </a:spcAft>
-              <a:buNone/>
-            </a:pPr>
-            <a:r>
-              <a:rPr b="0" i="0" lang="en" sz="1300" u="none" cap="none" strike="noStrike">
+              </a:rPr>
+              <a:t>github.com/Suyash2205/Care-Companion-/releases</a:t>
+            </a:r>
+          </a:p>
+        </p:txBody>
+      </p:sp>
+      <p:sp>
+        <p:nvSpPr>
+          <p:cNvPr id="502" name="Oval 501"/>
+          <p:cNvSpPr/>
+          <p:nvPr/>
+        </p:nvSpPr>
+        <p:spPr>
+          <a:xfrm>
+            <a:off x="6583680" y="786384"/>
+            <a:ext cx="347472" cy="347472"/>
+          </a:xfrm>
+          <a:prstGeom prst="ellipse">
+            <a:avLst/>
+          </a:prstGeom>
+          <a:solidFill>
+            <a:srgbClr val="101010"/>
+          </a:solidFill>
+          <a:ln>
+            <a:noFill/>
+          </a:ln>
+          <a:effectLst/>
+        </p:spPr>
+        <p:style>
+          <a:lnRef idx="1">
+            <a:schemeClr val="accent1"/>
+          </a:lnRef>
+          <a:fillRef idx="3">
+            <a:schemeClr val="accent1"/>
+          </a:fillRef>
+          <a:effectRef idx="2">
+            <a:schemeClr val="accent1"/>
+          </a:effectRef>
+          <a:fontRef idx="minor">
+            <a:schemeClr val="lt1"/>
+          </a:fontRef>
+        </p:style>
+        <p:txBody>
+          <a:bodyPr rtlCol="0" anchor="ctr" wrap="square" lIns="73152" rIns="73152" tIns="36576" bIns="36576"/>
+          <a:lstStyle/>
+          <a:p>
+            <a:pPr algn="ctr">
+              <a:spcAft>
+                <a:spcPts val="0"/>
+              </a:spcAft>
+            </a:pPr>
+            <a:r>
+              <a:rPr sz="1200" b="1">
+                <a:solidFill>
+                  <a:srgbClr val="FFFFFF"/>
+                </a:solidFill>
+                <a:latin typeface="Georgia"/>
+              </a:rPr>
+              <a:t>2</a:t>
+            </a:r>
+          </a:p>
+        </p:txBody>
+      </p:sp>
+      <p:sp>
+        <p:nvSpPr>
+          <p:cNvPr id="503" name="Rounded Rectangle 502"/>
+          <p:cNvSpPr/>
+          <p:nvPr/>
+        </p:nvSpPr>
+        <p:spPr>
+          <a:xfrm>
+            <a:off x="484632" y="2194560"/>
+            <a:ext cx="3840480" cy="1024128"/>
+          </a:xfrm>
+          <a:prstGeom prst="roundRect">
+            <a:avLst/>
+          </a:prstGeom>
+          <a:solidFill>
+            <a:srgbClr val="FFFFFF"/>
+          </a:solidFill>
+          <a:ln>
+            <a:noFill/>
+          </a:ln>
+          <a:effectLst/>
+        </p:spPr>
+        <p:style>
+          <a:lnRef idx="1">
+            <a:schemeClr val="accent1"/>
+          </a:lnRef>
+          <a:fillRef idx="3">
+            <a:schemeClr val="accent1"/>
+          </a:fillRef>
+          <a:effectRef idx="2">
+            <a:schemeClr val="accent1"/>
+          </a:effectRef>
+          <a:fontRef idx="minor">
+            <a:schemeClr val="lt1"/>
+          </a:fontRef>
+        </p:style>
+        <p:txBody>
+          <a:bodyPr rtlCol="0" anchor="ctr" wrap="square"/>
+          <a:lstStyle/>
+          <a:p>
+            <a:pPr algn="ctr"/>
+            <a:r>
+              <a:rPr sz="1250" b="1">
+                <a:solidFill>
+                  <a:srgbClr val="9B1C2E"/>
+                </a:solidFill>
+                <a:latin typeface="Georgia"/>
+              </a:rPr>
+              <a:t>Research Paper</a:t>
+            </a:r>
+          </a:p>
+          <a:p>
+            <a:pPr algn="ctr"/>
+            <a:r>
+              <a:rPr sz="1100" b="0">
                 <a:solidFill>
                   <a:srgbClr val="101010"/>
                 </a:solidFill>
                 <a:latin typeface="Calibri"/>
-                <a:ea typeface="Calibri"/>
-                <a:cs typeface="Calibri"/>
-                <a:sym typeface="Calibri"/>
-              </a:rPr>
-              <a:t>• Research paper (IEEE format): submitted alongside this presentation</a:t>
-            </a:r>
-            <a:endParaRPr sz="1100"/>
-          </a:p>
-          <a:p>
-            <a:pPr indent="0" lvl="0" marL="0" marR="0" rtl="0" algn="l">
-              <a:lnSpc>
-                <a:spcPct val="150000"/>
-              </a:lnSpc>
-              <a:spcBef>
-                <a:spcPts val="0"/>
-              </a:spcBef>
-              <a:spcAft>
-                <a:spcPts val="0"/>
-              </a:spcAft>
-              <a:buNone/>
-            </a:pPr>
-            <a:r>
-              <a:rPr b="0" i="0" lang="en" sz="1300" u="none" cap="none" strike="noStrike">
+              </a:rPr>
+              <a:t>IEEE format — submitted with this presentation</a:t>
+            </a:r>
+          </a:p>
+        </p:txBody>
+      </p:sp>
+      <p:sp>
+        <p:nvSpPr>
+          <p:cNvPr id="504" name="Oval 503"/>
+          <p:cNvSpPr/>
+          <p:nvPr/>
+        </p:nvSpPr>
+        <p:spPr>
+          <a:xfrm>
+            <a:off x="2267712" y="2020824"/>
+            <a:ext cx="347472" cy="347472"/>
+          </a:xfrm>
+          <a:prstGeom prst="ellipse">
+            <a:avLst/>
+          </a:prstGeom>
+          <a:solidFill>
+            <a:srgbClr val="101010"/>
+          </a:solidFill>
+          <a:ln>
+            <a:noFill/>
+          </a:ln>
+          <a:effectLst/>
+        </p:spPr>
+        <p:style>
+          <a:lnRef idx="1">
+            <a:schemeClr val="accent1"/>
+          </a:lnRef>
+          <a:fillRef idx="3">
+            <a:schemeClr val="accent1"/>
+          </a:fillRef>
+          <a:effectRef idx="2">
+            <a:schemeClr val="accent1"/>
+          </a:effectRef>
+          <a:fontRef idx="minor">
+            <a:schemeClr val="lt1"/>
+          </a:fontRef>
+        </p:style>
+        <p:txBody>
+          <a:bodyPr rtlCol="0" anchor="ctr" wrap="square" lIns="73152" rIns="73152" tIns="36576" bIns="36576"/>
+          <a:lstStyle/>
+          <a:p>
+            <a:pPr algn="ctr">
+              <a:spcAft>
+                <a:spcPts val="0"/>
+              </a:spcAft>
+            </a:pPr>
+            <a:r>
+              <a:rPr sz="1200" b="1">
+                <a:solidFill>
+                  <a:srgbClr val="FFFFFF"/>
+                </a:solidFill>
+                <a:latin typeface="Georgia"/>
+              </a:rPr>
+              <a:t>3</a:t>
+            </a:r>
+          </a:p>
+        </p:txBody>
+      </p:sp>
+      <p:sp>
+        <p:nvSpPr>
+          <p:cNvPr id="505" name="Rounded Rectangle 504"/>
+          <p:cNvSpPr/>
+          <p:nvPr/>
+        </p:nvSpPr>
+        <p:spPr>
+          <a:xfrm>
+            <a:off x="4800600" y="2194560"/>
+            <a:ext cx="3840480" cy="1024128"/>
+          </a:xfrm>
+          <a:prstGeom prst="roundRect">
+            <a:avLst/>
+          </a:prstGeom>
+          <a:solidFill>
+            <a:srgbClr val="FFFFFF"/>
+          </a:solidFill>
+          <a:ln>
+            <a:noFill/>
+          </a:ln>
+          <a:effectLst/>
+        </p:spPr>
+        <p:style>
+          <a:lnRef idx="1">
+            <a:schemeClr val="accent1"/>
+          </a:lnRef>
+          <a:fillRef idx="3">
+            <a:schemeClr val="accent1"/>
+          </a:fillRef>
+          <a:effectRef idx="2">
+            <a:schemeClr val="accent1"/>
+          </a:effectRef>
+          <a:fontRef idx="minor">
+            <a:schemeClr val="lt1"/>
+          </a:fontRef>
+        </p:style>
+        <p:txBody>
+          <a:bodyPr rtlCol="0" anchor="ctr" wrap="square"/>
+          <a:lstStyle/>
+          <a:p>
+            <a:pPr algn="ctr"/>
+            <a:r>
+              <a:rPr sz="1250" b="1">
+                <a:solidFill>
+                  <a:srgbClr val="9B1C2E"/>
+                </a:solidFill>
+                <a:latin typeface="Georgia"/>
+              </a:rPr>
+              <a:t>User Manual</a:t>
+            </a:r>
+          </a:p>
+          <a:p>
+            <a:pPr algn="ctr"/>
+            <a:r>
+              <a:rPr sz="1100" b="0">
                 <a:solidFill>
                   <a:srgbClr val="101010"/>
                 </a:solidFill>
                 <a:latin typeface="Calibri"/>
-                <a:ea typeface="Calibri"/>
-                <a:cs typeface="Calibri"/>
-                <a:sym typeface="Calibri"/>
-              </a:rPr>
-              <a:t>• User manual (PDF): submitted alongside this presentation</a:t>
-            </a:r>
-            <a:endParaRPr sz="1100"/>
-          </a:p>
-          <a:p>
-            <a:pPr indent="0" lvl="0" marL="0" marR="0" rtl="0" algn="l">
-              <a:lnSpc>
-                <a:spcPct val="150000"/>
-              </a:lnSpc>
-              <a:spcBef>
-                <a:spcPts val="0"/>
-              </a:spcBef>
-              <a:spcAft>
-                <a:spcPts val="0"/>
-              </a:spcAft>
-              <a:buNone/>
-            </a:pPr>
-            <a:r>
-              <a:rPr b="0" i="0" lang="en" sz="1300" u="none" cap="none" strike="noStrike">
+              </a:rPr>
+              <a:t>PDF — submitted with this presentation</a:t>
+            </a:r>
+          </a:p>
+        </p:txBody>
+      </p:sp>
+      <p:sp>
+        <p:nvSpPr>
+          <p:cNvPr id="506" name="Oval 505"/>
+          <p:cNvSpPr/>
+          <p:nvPr/>
+        </p:nvSpPr>
+        <p:spPr>
+          <a:xfrm>
+            <a:off x="6583680" y="2020824"/>
+            <a:ext cx="347472" cy="347472"/>
+          </a:xfrm>
+          <a:prstGeom prst="ellipse">
+            <a:avLst/>
+          </a:prstGeom>
+          <a:solidFill>
+            <a:srgbClr val="101010"/>
+          </a:solidFill>
+          <a:ln>
+            <a:noFill/>
+          </a:ln>
+          <a:effectLst/>
+        </p:spPr>
+        <p:style>
+          <a:lnRef idx="1">
+            <a:schemeClr val="accent1"/>
+          </a:lnRef>
+          <a:fillRef idx="3">
+            <a:schemeClr val="accent1"/>
+          </a:fillRef>
+          <a:effectRef idx="2">
+            <a:schemeClr val="accent1"/>
+          </a:effectRef>
+          <a:fontRef idx="minor">
+            <a:schemeClr val="lt1"/>
+          </a:fontRef>
+        </p:style>
+        <p:txBody>
+          <a:bodyPr rtlCol="0" anchor="ctr" wrap="square" lIns="73152" rIns="73152" tIns="36576" bIns="36576"/>
+          <a:lstStyle/>
+          <a:p>
+            <a:pPr algn="ctr">
+              <a:spcAft>
+                <a:spcPts val="0"/>
+              </a:spcAft>
+            </a:pPr>
+            <a:r>
+              <a:rPr sz="1200" b="1">
+                <a:solidFill>
+                  <a:srgbClr val="FFFFFF"/>
+                </a:solidFill>
+                <a:latin typeface="Georgia"/>
+              </a:rPr>
+              <a:t>4</a:t>
+            </a:r>
+          </a:p>
+        </p:txBody>
+      </p:sp>
+      <p:sp>
+        <p:nvSpPr>
+          <p:cNvPr id="507" name="Rounded Rectangle 506"/>
+          <p:cNvSpPr/>
+          <p:nvPr/>
+        </p:nvSpPr>
+        <p:spPr>
+          <a:xfrm>
+            <a:off x="484632" y="3429000"/>
+            <a:ext cx="3840480" cy="1024128"/>
+          </a:xfrm>
+          <a:prstGeom prst="roundRect">
+            <a:avLst/>
+          </a:prstGeom>
+          <a:solidFill>
+            <a:srgbClr val="FFFFFF"/>
+          </a:solidFill>
+          <a:ln>
+            <a:noFill/>
+          </a:ln>
+          <a:effectLst/>
+        </p:spPr>
+        <p:style>
+          <a:lnRef idx="1">
+            <a:schemeClr val="accent1"/>
+          </a:lnRef>
+          <a:fillRef idx="3">
+            <a:schemeClr val="accent1"/>
+          </a:fillRef>
+          <a:effectRef idx="2">
+            <a:schemeClr val="accent1"/>
+          </a:effectRef>
+          <a:fontRef idx="minor">
+            <a:schemeClr val="lt1"/>
+          </a:fontRef>
+        </p:style>
+        <p:txBody>
+          <a:bodyPr rtlCol="0" anchor="ctr" wrap="square"/>
+          <a:lstStyle/>
+          <a:p>
+            <a:pPr algn="ctr"/>
+            <a:r>
+              <a:rPr sz="1250" b="1">
+                <a:solidFill>
+                  <a:srgbClr val="9B1C2E"/>
+                </a:solidFill>
+                <a:latin typeface="Georgia"/>
+              </a:rPr>
+              <a:t>Conference Submission</a:t>
+            </a:r>
+          </a:p>
+          <a:p>
+            <a:pPr algn="ctr"/>
+            <a:r>
+              <a:rPr sz="1100" b="0">
                 <a:solidFill>
                   <a:srgbClr val="101010"/>
                 </a:solidFill>
                 <a:latin typeface="Calibri"/>
-                <a:ea typeface="Calibri"/>
-                <a:cs typeface="Calibri"/>
-                <a:sym typeface="Calibri"/>
-              </a:rPr>
-              <a:t>• Demo video: to be added before the demonstration</a:t>
-            </a:r>
-            <a:endParaRPr sz="1100"/>
+              </a:rPr>
+              <a:t>www.iciss2027.in</a:t>
+            </a:r>
+          </a:p>
+        </p:txBody>
+      </p:sp>
+      <p:sp>
+        <p:nvSpPr>
+          <p:cNvPr id="508" name="Oval 507"/>
+          <p:cNvSpPr/>
+          <p:nvPr/>
+        </p:nvSpPr>
+        <p:spPr>
+          <a:xfrm>
+            <a:off x="2267712" y="3255264"/>
+            <a:ext cx="347472" cy="347472"/>
+          </a:xfrm>
+          <a:prstGeom prst="ellipse">
+            <a:avLst/>
+          </a:prstGeom>
+          <a:solidFill>
+            <a:srgbClr val="101010"/>
+          </a:solidFill>
+          <a:ln>
+            <a:noFill/>
+          </a:ln>
+          <a:effectLst/>
+        </p:spPr>
+        <p:style>
+          <a:lnRef idx="1">
+            <a:schemeClr val="accent1"/>
+          </a:lnRef>
+          <a:fillRef idx="3">
+            <a:schemeClr val="accent1"/>
+          </a:fillRef>
+          <a:effectRef idx="2">
+            <a:schemeClr val="accent1"/>
+          </a:effectRef>
+          <a:fontRef idx="minor">
+            <a:schemeClr val="lt1"/>
+          </a:fontRef>
+        </p:style>
+        <p:txBody>
+          <a:bodyPr rtlCol="0" anchor="ctr" wrap="square" lIns="73152" rIns="73152" tIns="36576" bIns="36576"/>
+          <a:lstStyle/>
+          <a:p>
+            <a:pPr algn="ctr">
+              <a:spcAft>
+                <a:spcPts val="0"/>
+              </a:spcAft>
+            </a:pPr>
+            <a:r>
+              <a:rPr sz="1200" b="1">
+                <a:solidFill>
+                  <a:srgbClr val="FFFFFF"/>
+                </a:solidFill>
+                <a:latin typeface="Georgia"/>
+              </a:rPr>
+              <a:t>5</a:t>
+            </a:r>
+          </a:p>
+        </p:txBody>
+      </p:sp>
+      <p:sp>
+        <p:nvSpPr>
+          <p:cNvPr id="509" name="Rounded Rectangle 508"/>
+          <p:cNvSpPr/>
+          <p:nvPr/>
+        </p:nvSpPr>
+        <p:spPr>
+          <a:xfrm>
+            <a:off x="4800600" y="3429000"/>
+            <a:ext cx="3840480" cy="1024128"/>
+          </a:xfrm>
+          <a:prstGeom prst="roundRect">
+            <a:avLst/>
+          </a:prstGeom>
+          <a:solidFill>
+            <a:srgbClr val="FFFFFF"/>
+          </a:solidFill>
+          <a:ln>
+            <a:noFill/>
+          </a:ln>
+          <a:effectLst/>
+        </p:spPr>
+        <p:style>
+          <a:lnRef idx="1">
+            <a:schemeClr val="accent1"/>
+          </a:lnRef>
+          <a:fillRef idx="3">
+            <a:schemeClr val="accent1"/>
+          </a:fillRef>
+          <a:effectRef idx="2">
+            <a:schemeClr val="accent1"/>
+          </a:effectRef>
+          <a:fontRef idx="minor">
+            <a:schemeClr val="lt1"/>
+          </a:fontRef>
+        </p:style>
+        <p:txBody>
+          <a:bodyPr rtlCol="0" anchor="ctr" wrap="square"/>
+          <a:lstStyle/>
+          <a:p>
+            <a:pPr algn="ctr"/>
+            <a:r>
+              <a:rPr sz="1250" b="1">
+                <a:solidFill>
+                  <a:srgbClr val="9B1C2E"/>
+                </a:solidFill>
+                <a:latin typeface="Georgia"/>
+              </a:rPr>
+              <a:t>Demo Video</a:t>
+            </a:r>
+          </a:p>
+          <a:p>
+            <a:pPr algn="ctr"/>
+            <a:r>
+              <a:rPr sz="1100" b="0">
+                <a:solidFill>
+                  <a:srgbClr val="101010"/>
+                </a:solidFill>
+                <a:latin typeface="Calibri"/>
+              </a:rPr>
+              <a:t>To be added before the demonstration</a:t>
+            </a:r>
+          </a:p>
+        </p:txBody>
+      </p:sp>
+      <p:sp>
+        <p:nvSpPr>
+          <p:cNvPr id="510" name="Oval 509"/>
+          <p:cNvSpPr/>
+          <p:nvPr/>
+        </p:nvSpPr>
+        <p:spPr>
+          <a:xfrm>
+            <a:off x="6583680" y="3255264"/>
+            <a:ext cx="347472" cy="347472"/>
+          </a:xfrm>
+          <a:prstGeom prst="ellipse">
+            <a:avLst/>
+          </a:prstGeom>
+          <a:solidFill>
+            <a:srgbClr val="101010"/>
+          </a:solidFill>
+          <a:ln>
+            <a:noFill/>
+          </a:ln>
+          <a:effectLst/>
+        </p:spPr>
+        <p:style>
+          <a:lnRef idx="1">
+            <a:schemeClr val="accent1"/>
+          </a:lnRef>
+          <a:fillRef idx="3">
+            <a:schemeClr val="accent1"/>
+          </a:fillRef>
+          <a:effectRef idx="2">
+            <a:schemeClr val="accent1"/>
+          </a:effectRef>
+          <a:fontRef idx="minor">
+            <a:schemeClr val="lt1"/>
+          </a:fontRef>
+        </p:style>
+        <p:txBody>
+          <a:bodyPr rtlCol="0" anchor="ctr" wrap="square" lIns="73152" rIns="73152" tIns="36576" bIns="36576"/>
+          <a:lstStyle/>
+          <a:p>
+            <a:pPr algn="ctr">
+              <a:spcAft>
+                <a:spcPts val="0"/>
+              </a:spcAft>
+            </a:pPr>
+            <a:r>
+              <a:rPr sz="1200" b="1">
+                <a:solidFill>
+                  <a:srgbClr val="FFFFFF"/>
+                </a:solidFill>
+                <a:latin typeface="Georgia"/>
+              </a:rPr>
+              <a:t>6</a:t>
+            </a:r>
           </a:p>
         </p:txBody>
       </p:sp>

--- a/ppt/CareCompanion-IE1.pptx
+++ b/ppt/CareCompanion-IE1.pptx
@@ -42994,7 +42994,7 @@
           <a:p>
             <a:pPr algn="ctr"/>
             <a:r>
-              <a:rPr sz="1250" b="1">
+              <a:rPr sz="1150" b="1">
                 <a:solidFill>
                   <a:srgbClr val="9B1C2E"/>
                 </a:solidFill>
@@ -43006,13 +43006,13 @@
           <a:p>
             <a:pPr algn="ctr"/>
             <a:r>
-              <a:rPr sz="1100" b="0">
+              <a:rPr sz="1000" b="0">
                 <a:solidFill>
                   <a:srgbClr val="101010"/>
                 </a:solidFill>
                 <a:latin typeface="Calibri"/>
               </a:rPr>
-              <a:t>Track quantity in hand; stock falls as doses are taken</a:t>
+              <a:t>Track quantity in hand; stock falls as doses are taken and the guardian is alerted before a medicine runs out</a:t>
             </a:r>
           </a:p>
         </p:txBody>
@@ -43116,25 +43116,25 @@
           <a:p>
             <a:pPr algn="ctr"/>
             <a:r>
-              <a:rPr sz="1250" b="1">
+              <a:rPr sz="1150" b="1">
                 <a:solidFill>
                   <a:srgbClr val="9B1C2E"/>
                 </a:solidFill>
                 <a:latin typeface="Georgia"/>
               </a:rPr>
-              <a:t>Low-Stock Alerts</a:t>
+              <a:t>AI Voice Assistant</a:t>
             </a:r>
           </a:p>
           <a:p>
             <a:pPr algn="ctr"/>
             <a:r>
-              <a:rPr sz="1100" b="0">
+              <a:rPr sz="1000" b="0">
                 <a:solidFill>
                   <a:srgbClr val="101010"/>
                 </a:solidFill>
                 <a:latin typeface="Calibri"/>
               </a:rPr>
-              <a:t>Guardian notified before a medicine runs out, to restock in time</a:t>
+              <a:t>Speech recognition and a language model let elders confirm doses by speaking in Hindi, Marathi or Gujarati, and the app replies in their language</a:t>
             </a:r>
           </a:p>
         </p:txBody>
@@ -43238,25 +43238,25 @@
           <a:p>
             <a:pPr algn="ctr"/>
             <a:r>
-              <a:rPr sz="1250" b="1">
+              <a:rPr sz="1150" b="1">
                 <a:solidFill>
                   <a:srgbClr val="9B1C2E"/>
                 </a:solidFill>
                 <a:latin typeface="Georgia"/>
               </a:rPr>
-              <a:t>iOS Application</a:t>
+              <a:t>Conversational Insights</a:t>
             </a:r>
           </a:p>
           <a:p>
             <a:pPr algn="ctr"/>
             <a:r>
-              <a:rPr sz="1100" b="0">
+              <a:rPr sz="1000" b="0">
                 <a:solidFill>
                   <a:srgbClr val="101010"/>
                 </a:solidFill>
                 <a:latin typeface="Calibri"/>
               </a:rPr>
-              <a:t>Extend CareCompanion to iPhone users</a:t>
+              <a:t>Guardians ask questions of the care data and receive spoken adherence summaries</a:t>
             </a:r>
           </a:p>
         </p:txBody>
@@ -43360,25 +43360,25 @@
           <a:p>
             <a:pPr algn="ctr"/>
             <a:r>
-              <a:rPr sz="1250" b="1">
+              <a:rPr sz="1150" b="1">
                 <a:solidFill>
                   <a:srgbClr val="9B1C2E"/>
                 </a:solidFill>
                 <a:latin typeface="Georgia"/>
               </a:rPr>
-              <a:t>Google Play Release</a:t>
+              <a:t>iOS Application</a:t>
             </a:r>
           </a:p>
           <a:p>
             <a:pPr algn="ctr"/>
             <a:r>
-              <a:rPr sz="1100" b="0">
+              <a:rPr sz="1000" b="0">
                 <a:solidFill>
                   <a:srgbClr val="101010"/>
                 </a:solidFill>
                 <a:latin typeface="Calibri"/>
               </a:rPr>
-              <a:t>Publish for public distribution and real-world use</a:t>
+              <a:t>Extend CareCompanion to iPhone users</a:t>
             </a:r>
           </a:p>
         </p:txBody>
@@ -43482,25 +43482,25 @@
           <a:p>
             <a:pPr algn="ctr"/>
             <a:r>
-              <a:rPr sz="1250" b="1">
+              <a:rPr sz="1150" b="1">
                 <a:solidFill>
                   <a:srgbClr val="9B1C2E"/>
                 </a:solidFill>
                 <a:latin typeface="Georgia"/>
               </a:rPr>
-              <a:t>User Study</a:t>
+              <a:t>Google Play Release</a:t>
             </a:r>
           </a:p>
           <a:p>
             <a:pPr algn="ctr"/>
             <a:r>
-              <a:rPr sz="1100" b="0">
+              <a:rPr sz="1000" b="0">
                 <a:solidFill>
                   <a:srgbClr val="101010"/>
                 </a:solidFill>
                 <a:latin typeface="Calibri"/>
               </a:rPr>
-              <a:t>Evaluate with elderly participants and their caregivers</a:t>
+              <a:t>Publish for public distribution and real-world use</a:t>
             </a:r>
           </a:p>
         </p:txBody>
@@ -43604,25 +43604,25 @@
           <a:p>
             <a:pPr algn="ctr"/>
             <a:r>
-              <a:rPr sz="1250" b="1">
+              <a:rPr sz="1150" b="1">
                 <a:solidFill>
                   <a:srgbClr val="9B1C2E"/>
                 </a:solidFill>
                 <a:latin typeface="Georgia"/>
               </a:rPr>
-              <a:t>Voice &amp; Vernacular Input</a:t>
+              <a:t>User Study</a:t>
             </a:r>
           </a:p>
           <a:p>
             <a:pPr algn="ctr"/>
             <a:r>
-              <a:rPr sz="1100" b="0">
+              <a:rPr sz="1000" b="0">
                 <a:solidFill>
                   <a:srgbClr val="101010"/>
                 </a:solidFill>
                 <a:latin typeface="Calibri"/>
               </a:rPr>
-              <a:t>Speech support for users who find typing difficult</a:t>
+              <a:t>Evaluate with elderly participants and their caregivers</a:t>
             </a:r>
           </a:p>
         </p:txBody>
